--- a/docs/Elevate_Presentation.pptx
+++ b/docs/Elevate_Presentation.pptx
@@ -4,21 +4,22 @@
   <p:sldMasterIdLst>
     <p:sldMasterId id="2147483648" r:id="rId1"/>
   </p:sldMasterIdLst>
+  <p:notesMasterIdLst>
+    <p:notesMasterId r:id="rId12"/>
+  </p:notesMasterIdLst>
   <p:sldIdLst>
     <p:sldId id="256" r:id="rId2"/>
     <p:sldId id="257" r:id="rId3"/>
-    <p:sldId id="258" r:id="rId4"/>
-    <p:sldId id="259" r:id="rId5"/>
-    <p:sldId id="260" r:id="rId6"/>
-    <p:sldId id="261" r:id="rId7"/>
-    <p:sldId id="262" r:id="rId8"/>
-    <p:sldId id="263" r:id="rId9"/>
-    <p:sldId id="264" r:id="rId10"/>
+    <p:sldId id="265" r:id="rId4"/>
+    <p:sldId id="258" r:id="rId5"/>
+    <p:sldId id="259" r:id="rId6"/>
+    <p:sldId id="260" r:id="rId7"/>
+    <p:sldId id="261" r:id="rId8"/>
+    <p:sldId id="262" r:id="rId9"/>
+    <p:sldId id="263" r:id="rId10"/>
+    <p:sldId id="264" r:id="rId11"/>
   </p:sldIdLst>
-  <p:notesMasterIdLst>
-    <p:notesMasterId r:id="rId11"/>
-  </p:notesMasterIdLst>
-  <p:sldSz cx="9144000" cy="5143500"/>
+  <p:sldSz cx="9144000" cy="5143500" type="screen16x9"/>
   <p:notesSz cx="5143500" cy="9144000"/>
   <p:defaultTextStyle>
     <a:lvl1pPr marL="0" algn="l" defTabSz="914400" rtl="0" eaLnBrk="1" latinLnBrk="0" hangingPunct="1">
@@ -112,6 +113,11 @@
       </a:defRPr>
     </a:lvl9pPr>
   </p:defaultTextStyle>
+  <p:extLst>
+    <p:ext uri="{EFAFB233-063F-42B5-8137-9DF3F51BA10A}">
+      <p15:sldGuideLst xmlns:p15="http://schemas.microsoft.com/office/powerpoint/2012/main"/>
+    </p:ext>
+  </p:extLst>
 </p:presentation>
 </file>
 
@@ -137,234 +143,10 @@
           <a:chExt cx="0" cy="0"/>
         </a:xfrm>
       </p:grpSpPr>
-      <p:sp>
-        <p:nvSpPr>
-          <p:cNvPr id="2" name="Header Placeholder 1"/>
-          <p:cNvSpPr>
-            <a:spLocks noGrp="1"/>
-          </p:cNvSpPr>
-          <p:nvPr>
-            <p:ph type="hdr" sz="quarter"/>
-          </p:nvPr>
-        </p:nvSpPr>
-        <p:spPr>
-          <a:xfrm>
-            <a:off x="0" y="0"/>
-            <a:ext cx="2971800" cy="458788"/>
-          </a:xfrm>
-          <a:prstGeom prst="rect">
-            <a:avLst/>
-          </a:prstGeom>
-        </p:spPr>
-        <p:txBody>
-          <a:bodyPr vert="horz" lIns="91440" tIns="45720" rIns="91440" bIns="45720" rtlCol="0"/>
-          <a:lstStyle>
-            <a:lvl1pPr algn="l">
-              <a:defRPr sz="1200"/>
-            </a:lvl1pPr>
-          </a:lstStyle>
-          <a:p>
-            <a:endParaRPr lang="en-US"/>
-          </a:p>
-        </p:txBody>
-      </p:sp>
-      <p:sp>
-        <p:nvSpPr>
-          <p:cNvPr id="3" name="Date Placeholder 2"/>
-          <p:cNvSpPr>
-            <a:spLocks noGrp="1"/>
-          </p:cNvSpPr>
-          <p:nvPr>
-            <p:ph type="dt" idx="1"/>
-          </p:nvPr>
-        </p:nvSpPr>
-        <p:spPr>
-          <a:xfrm>
-            <a:off x="3884613" y="0"/>
-            <a:ext cx="2971800" cy="458788"/>
-          </a:xfrm>
-          <a:prstGeom prst="rect">
-            <a:avLst/>
-          </a:prstGeom>
-        </p:spPr>
-        <p:txBody>
-          <a:bodyPr vert="horz" lIns="91440" tIns="45720" rIns="91440" bIns="45720" rtlCol="0"/>
-          <a:lstStyle>
-            <a:lvl1pPr algn="r">
-              <a:defRPr sz="1200"/>
-            </a:lvl1pPr>
-          </a:lstStyle>
-          <a:p>
-            <a:fld id="{5282F153-3F37-0F45-9E97-73ACFA13230C}" type="datetimeFigureOut">
-              <a:rPr lang="en-US"/>
-              <a:t>7/23/19</a:t>
-            </a:fld>
-            <a:endParaRPr lang="en-US"/>
-          </a:p>
-        </p:txBody>
-      </p:sp>
-      <p:sp>
-        <p:nvSpPr>
-          <p:cNvPr id="4" name="Slide Image Placeholder 3"/>
-          <p:cNvSpPr>
-            <a:spLocks noGrp="1" noRot="1" noChangeAspect="1"/>
-          </p:cNvSpPr>
-          <p:nvPr>
-            <p:ph type="sldImg" idx="2"/>
-          </p:nvPr>
-        </p:nvSpPr>
-        <p:spPr>
-          <a:xfrm>
-            <a:off x="685800" y="1143000"/>
-            <a:ext cx="5486400" cy="3086100"/>
-          </a:xfrm>
-          <a:prstGeom prst="rect">
-            <a:avLst/>
-          </a:prstGeom>
-          <a:noFill/>
-          <a:ln w="12700">
-            <a:solidFill>
-              <a:prstClr val="black"/>
-            </a:solidFill>
-          </a:ln>
-        </p:spPr>
-        <p:txBody>
-          <a:bodyPr vert="horz" lIns="91440" tIns="45720" rIns="91440" bIns="45720" rtlCol="0" anchor="ctr"/>
-          <a:lstStyle/>
-          <a:p>
-            <a:endParaRPr lang="en-US"/>
-          </a:p>
-        </p:txBody>
-      </p:sp>
-      <p:sp>
-        <p:nvSpPr>
-          <p:cNvPr id="5" name="Notes Placeholder 4"/>
-          <p:cNvSpPr>
-            <a:spLocks noGrp="1"/>
-          </p:cNvSpPr>
-          <p:nvPr>
-            <p:ph type="body" sz="quarter" idx="3"/>
-          </p:nvPr>
-        </p:nvSpPr>
-        <p:spPr>
-          <a:xfrm>
-            <a:off x="685800" y="4400550"/>
-            <a:ext cx="5486400" cy="3600450"/>
-          </a:xfrm>
-          <a:prstGeom prst="rect">
-            <a:avLst/>
-          </a:prstGeom>
-        </p:spPr>
-        <p:txBody>
-          <a:bodyPr vert="horz" lIns="91440" tIns="45720" rIns="91440" bIns="45720" rtlCol="0"/>
-          <a:lstStyle/>
-          <a:p>
-            <a:pPr lvl="0"/>
-            <a:r>
-              <a:rPr lang="en-US"/>
-              <a:t>Click to edit Master text styles</a:t>
-            </a:r>
-          </a:p>
-          <a:p>
-            <a:pPr lvl="1"/>
-            <a:r>
-              <a:rPr lang="en-US"/>
-              <a:t>Second level</a:t>
-            </a:r>
-          </a:p>
-          <a:p>
-            <a:pPr lvl="2"/>
-            <a:r>
-              <a:rPr lang="en-US"/>
-              <a:t>Third level</a:t>
-            </a:r>
-          </a:p>
-          <a:p>
-            <a:pPr lvl="3"/>
-            <a:r>
-              <a:rPr lang="en-US"/>
-              <a:t>Fourth level</a:t>
-            </a:r>
-          </a:p>
-          <a:p>
-            <a:pPr lvl="4"/>
-            <a:r>
-              <a:rPr lang="en-US"/>
-              <a:t>Fifth level</a:t>
-            </a:r>
-          </a:p>
-        </p:txBody>
-      </p:sp>
-      <p:sp>
-        <p:nvSpPr>
-          <p:cNvPr id="6" name="Footer Placeholder 5"/>
-          <p:cNvSpPr>
-            <a:spLocks noGrp="1"/>
-          </p:cNvSpPr>
-          <p:nvPr>
-            <p:ph type="ftr" sz="quarter" idx="4"/>
-          </p:nvPr>
-        </p:nvSpPr>
-        <p:spPr>
-          <a:xfrm>
-            <a:off x="0" y="8685213"/>
-            <a:ext cx="2971800" cy="458787"/>
-          </a:xfrm>
-          <a:prstGeom prst="rect">
-            <a:avLst/>
-          </a:prstGeom>
-        </p:spPr>
-        <p:txBody>
-          <a:bodyPr vert="horz" lIns="91440" tIns="45720" rIns="91440" bIns="45720" rtlCol="0" anchor="b"/>
-          <a:lstStyle>
-            <a:lvl1pPr algn="l">
-              <a:defRPr sz="1200"/>
-            </a:lvl1pPr>
-          </a:lstStyle>
-          <a:p>
-            <a:endParaRPr lang="en-US"/>
-          </a:p>
-        </p:txBody>
-      </p:sp>
-      <p:sp>
-        <p:nvSpPr>
-          <p:cNvPr id="7" name="Slide Number Placeholder 6"/>
-          <p:cNvSpPr>
-            <a:spLocks noGrp="1"/>
-          </p:cNvSpPr>
-          <p:nvPr>
-            <p:ph type="sldNum" sz="quarter" idx="5"/>
-          </p:nvPr>
-        </p:nvSpPr>
-        <p:spPr>
-          <a:xfrm>
-            <a:off x="3884613" y="8685213"/>
-            <a:ext cx="2971800" cy="458787"/>
-          </a:xfrm>
-          <a:prstGeom prst="rect">
-            <a:avLst/>
-          </a:prstGeom>
-        </p:spPr>
-        <p:txBody>
-          <a:bodyPr vert="horz" lIns="91440" tIns="45720" rIns="91440" bIns="45720" rtlCol="0" anchor="b"/>
-          <a:lstStyle>
-            <a:lvl1pPr algn="r">
-              <a:defRPr sz="1200"/>
-            </a:lvl1pPr>
-          </a:lstStyle>
-          <a:p>
-            <a:fld id="{CE5E9CC1-C706-0F49-92D6-E571CC5EEA8F}" type="slidenum">
-              <a:rPr lang="en-US"/>
-              <a:t>‹#›</a:t>
-            </a:fld>
-            <a:endParaRPr lang="en-US"/>
-          </a:p>
-        </p:txBody>
-      </p:sp>
     </p:spTree>
     <p:extLst>
       <p:ext uri="{BB962C8B-B14F-4D97-AF65-F5344CB8AC3E}">
-        <p14:creationId xmlns:p14="http://schemas.microsoft.com/office/powerpoint/2010/main" val="1024086991"/>
+        <p14:creationId xmlns:p14="http://schemas.microsoft.com/office/powerpoint/2010/main" val="2968317193"/>
       </p:ext>
     </p:extLst>
   </p:cSld>
@@ -508,10 +290,6 @@
           <a:bodyPr/>
           <a:lstStyle/>
           <a:p>
-            <a:r>
-              <a:rPr lang="en-US" dirty="0"/>
-              <a:t/>
-            </a:r>
             <a:endParaRPr lang="en-US" dirty="0"/>
           </a:p>
         </p:txBody>
@@ -534,6 +312,90 @@
             <a:fld id="{F7021451-1387-4CA6-816F-3879F97B5CBC}" type="slidenum">
               <a:rPr lang="en-US"/>
               <a:t>1</a:t>
+            </a:fld>
+            <a:endParaRPr lang="en-US"/>
+          </a:p>
+        </p:txBody>
+      </p:sp>
+    </p:spTree>
+    <p:extLst>
+      <p:ext uri="{BB962C8B-B14F-4D97-AF65-F5344CB8AC3E}">
+        <p14:creationId xmlns:p14="http://schemas.microsoft.com/office/powerpoint/2010/main" val="1024086991"/>
+      </p:ext>
+    </p:extLst>
+  </p:cSld>
+  <p:clrMapOvr>
+    <a:masterClrMapping/>
+  </p:clrMapOvr>
+</p:notes>
+</file>
+
+<file path=ppt/notesSlides/notesSlide10.xml><?xml version="1.0" encoding="utf-8"?>
+<p:notes xmlns:a="http://schemas.openxmlformats.org/drawingml/2006/main" xmlns:r="http://schemas.openxmlformats.org/officeDocument/2006/relationships" xmlns:p="http://schemas.openxmlformats.org/presentationml/2006/main">
+  <p:cSld>
+    <p:spTree>
+      <p:nvGrpSpPr>
+        <p:cNvPr id="1" name=""/>
+        <p:cNvGrpSpPr/>
+        <p:nvPr/>
+      </p:nvGrpSpPr>
+      <p:grpSpPr>
+        <a:xfrm>
+          <a:off x="0" y="0"/>
+          <a:ext cx="0" cy="0"/>
+          <a:chOff x="0" y="0"/>
+          <a:chExt cx="0" cy="0"/>
+        </a:xfrm>
+      </p:grpSpPr>
+      <p:sp>
+        <p:nvSpPr>
+          <p:cNvPr id="2" name="Slide Image Placeholder 1"/>
+          <p:cNvSpPr>
+            <a:spLocks noGrp="1" noRot="1" noChangeAspect="1"/>
+          </p:cNvSpPr>
+          <p:nvPr>
+            <p:ph type="sldImg"/>
+          </p:nvPr>
+        </p:nvSpPr>
+        <p:spPr/>
+      </p:sp>
+      <p:sp>
+        <p:nvSpPr>
+          <p:cNvPr id="3" name="Notes Placeholder 2"/>
+          <p:cNvSpPr>
+            <a:spLocks noGrp="1"/>
+          </p:cNvSpPr>
+          <p:nvPr>
+            <p:ph type="body" idx="1"/>
+          </p:nvPr>
+        </p:nvSpPr>
+        <p:spPr/>
+        <p:txBody>
+          <a:bodyPr/>
+          <a:lstStyle/>
+          <a:p>
+            <a:endParaRPr lang="en-US" dirty="0"/>
+          </a:p>
+        </p:txBody>
+      </p:sp>
+      <p:sp>
+        <p:nvSpPr>
+          <p:cNvPr id="4" name="Slide Number Placeholder 3"/>
+          <p:cNvSpPr>
+            <a:spLocks noGrp="1"/>
+          </p:cNvSpPr>
+          <p:nvPr>
+            <p:ph type="sldNum" sz="quarter" idx="10"/>
+          </p:nvPr>
+        </p:nvSpPr>
+        <p:spPr/>
+        <p:txBody>
+          <a:bodyPr/>
+          <a:lstStyle/>
+          <a:p>
+            <a:fld id="{F7021451-1387-4CA6-816F-3879F97B5CBC}" type="slidenum">
+              <a:rPr lang="en-US"/>
+              <a:t>10</a:t>
             </a:fld>
             <a:endParaRPr lang="en-US"/>
           </a:p>
@@ -596,10 +458,6 @@
           <a:bodyPr/>
           <a:lstStyle/>
           <a:p>
-            <a:r>
-              <a:rPr lang="en-US" dirty="0"/>
-              <a:t/>
-            </a:r>
             <a:endParaRPr lang="en-US" dirty="0"/>
           </a:p>
         </p:txBody>
@@ -645,7 +503,13 @@
   <p:cSld>
     <p:spTree>
       <p:nvGrpSpPr>
-        <p:cNvPr id="1" name=""/>
+        <p:cNvPr id="1" name="">
+          <a:extLst>
+            <a:ext uri="{FF2B5EF4-FFF2-40B4-BE49-F238E27FC236}">
+              <a16:creationId xmlns:a16="http://schemas.microsoft.com/office/drawing/2014/main" id="{CD90448F-4673-7F67-CDA3-4341F7F4D4AB}"/>
+            </a:ext>
+          </a:extLst>
+        </p:cNvPr>
         <p:cNvGrpSpPr/>
         <p:nvPr/>
       </p:nvGrpSpPr>
@@ -659,7 +523,13 @@
       </p:grpSpPr>
       <p:sp>
         <p:nvSpPr>
-          <p:cNvPr id="2" name="Slide Image Placeholder 1"/>
+          <p:cNvPr id="2" name="Slide Image Placeholder 1">
+            <a:extLst>
+              <a:ext uri="{FF2B5EF4-FFF2-40B4-BE49-F238E27FC236}">
+                <a16:creationId xmlns:a16="http://schemas.microsoft.com/office/drawing/2014/main" id="{0AEE8EC7-BF2E-75A5-72E2-071EC5C1FBD5}"/>
+              </a:ext>
+            </a:extLst>
+          </p:cNvPr>
           <p:cNvSpPr>
             <a:spLocks noGrp="1" noRot="1" noChangeAspect="1"/>
           </p:cNvSpPr>
@@ -671,7 +541,13 @@
       </p:sp>
       <p:sp>
         <p:nvSpPr>
-          <p:cNvPr id="3" name="Notes Placeholder 2"/>
+          <p:cNvPr id="3" name="Notes Placeholder 2">
+            <a:extLst>
+              <a:ext uri="{FF2B5EF4-FFF2-40B4-BE49-F238E27FC236}">
+                <a16:creationId xmlns:a16="http://schemas.microsoft.com/office/drawing/2014/main" id="{5D59A036-3276-AD2D-A2A2-C05D6CDC7854}"/>
+              </a:ext>
+            </a:extLst>
+          </p:cNvPr>
           <p:cNvSpPr>
             <a:spLocks noGrp="1"/>
           </p:cNvSpPr>
@@ -684,17 +560,19 @@
           <a:bodyPr/>
           <a:lstStyle/>
           <a:p>
-            <a:r>
-              <a:rPr lang="en-US" dirty="0"/>
-              <a:t/>
-            </a:r>
             <a:endParaRPr lang="en-US" dirty="0"/>
           </a:p>
         </p:txBody>
       </p:sp>
       <p:sp>
         <p:nvSpPr>
-          <p:cNvPr id="4" name="Slide Number Placeholder 3"/>
+          <p:cNvPr id="4" name="Slide Number Placeholder 3">
+            <a:extLst>
+              <a:ext uri="{FF2B5EF4-FFF2-40B4-BE49-F238E27FC236}">
+                <a16:creationId xmlns:a16="http://schemas.microsoft.com/office/drawing/2014/main" id="{BC843914-E903-8527-3F6B-F943C34F1F56}"/>
+              </a:ext>
+            </a:extLst>
+          </p:cNvPr>
           <p:cNvSpPr>
             <a:spLocks noGrp="1"/>
           </p:cNvSpPr>
@@ -718,7 +596,7 @@
     </p:spTree>
     <p:extLst>
       <p:ext uri="{BB962C8B-B14F-4D97-AF65-F5344CB8AC3E}">
-        <p14:creationId xmlns:p14="http://schemas.microsoft.com/office/powerpoint/2010/main" val="1024086991"/>
+        <p14:creationId xmlns:p14="http://schemas.microsoft.com/office/powerpoint/2010/main" val="3755403978"/>
       </p:ext>
     </p:extLst>
   </p:cSld>
@@ -772,10 +650,6 @@
           <a:bodyPr/>
           <a:lstStyle/>
           <a:p>
-            <a:r>
-              <a:rPr lang="en-US" dirty="0"/>
-              <a:t/>
-            </a:r>
             <a:endParaRPr lang="en-US" dirty="0"/>
           </a:p>
         </p:txBody>
@@ -860,10 +734,6 @@
           <a:bodyPr/>
           <a:lstStyle/>
           <a:p>
-            <a:r>
-              <a:rPr lang="en-US" dirty="0"/>
-              <a:t/>
-            </a:r>
             <a:endParaRPr lang="en-US" dirty="0"/>
           </a:p>
         </p:txBody>
@@ -948,10 +818,6 @@
           <a:bodyPr/>
           <a:lstStyle/>
           <a:p>
-            <a:r>
-              <a:rPr lang="en-US" dirty="0"/>
-              <a:t/>
-            </a:r>
             <a:endParaRPr lang="en-US" dirty="0"/>
           </a:p>
         </p:txBody>
@@ -1036,10 +902,6 @@
           <a:bodyPr/>
           <a:lstStyle/>
           <a:p>
-            <a:r>
-              <a:rPr lang="en-US" dirty="0"/>
-              <a:t/>
-            </a:r>
             <a:endParaRPr lang="en-US" dirty="0"/>
           </a:p>
         </p:txBody>
@@ -1124,10 +986,6 @@
           <a:bodyPr/>
           <a:lstStyle/>
           <a:p>
-            <a:r>
-              <a:rPr lang="en-US" dirty="0"/>
-              <a:t/>
-            </a:r>
             <a:endParaRPr lang="en-US" dirty="0"/>
           </a:p>
         </p:txBody>
@@ -1212,10 +1070,6 @@
           <a:bodyPr/>
           <a:lstStyle/>
           <a:p>
-            <a:r>
-              <a:rPr lang="en-US" dirty="0"/>
-              <a:t/>
-            </a:r>
             <a:endParaRPr lang="en-US" dirty="0"/>
           </a:p>
         </p:txBody>
@@ -1289,6 +1143,11 @@
 <file path=ppt/slideMasters/slideMaster1.xml><?xml version="1.0" encoding="utf-8"?>
 <p:sldMaster xmlns:a="http://schemas.openxmlformats.org/drawingml/2006/main" xmlns:r="http://schemas.openxmlformats.org/officeDocument/2006/relationships" xmlns:p="http://schemas.openxmlformats.org/presentationml/2006/main">
   <p:cSld>
+    <p:bg>
+      <p:bgRef idx="1001">
+        <a:schemeClr val="bg1"/>
+      </p:bgRef>
+    </p:bg>
     <p:spTree>
       <p:nvGrpSpPr>
         <p:cNvPr id="1" name=""/>
@@ -1571,6 +1430,7 @@
         <a:solidFill>
           <a:srgbClr val="0D1117"/>
         </a:solidFill>
+        <a:effectLst/>
       </p:bgPr>
     </p:bg>
     <p:spTree>
@@ -1611,6 +1471,13 @@
             <a:prstDash val="solid"/>
           </a:ln>
         </p:spPr>
+        <p:txBody>
+          <a:bodyPr/>
+          <a:lstStyle/>
+          <a:p>
+            <a:endParaRPr lang="en-US"/>
+          </a:p>
+        </p:txBody>
       </p:sp>
       <p:sp>
         <p:nvSpPr>
@@ -1633,11 +1500,11 @@
           <a:bodyPr wrap="square" rtlCol="0" anchor="ctr"/>
           <a:lstStyle/>
           <a:p>
-            <a:pPr algn="ctr" indent="0" marL="0">
-              <a:buNone/>
-            </a:pPr>
-            <a:r>
-              <a:rPr lang="en-US" sz="7200" b="1" spc="800" kern="0" dirty="0">
+            <a:pPr marL="0" indent="0" algn="ctr">
+              <a:buNone/>
+            </a:pPr>
+            <a:r>
+              <a:rPr lang="en-US" sz="7200" b="1" kern="0" spc="800" dirty="0">
                 <a:solidFill>
                   <a:srgbClr val="58A6FF"/>
                 </a:solidFill>
@@ -1672,7 +1539,7 @@
           <a:bodyPr wrap="square" rtlCol="0" anchor="ctr"/>
           <a:lstStyle/>
           <a:p>
-            <a:pPr algn="ctr" indent="0" marL="0">
+            <a:pPr marL="0" indent="0" algn="ctr">
               <a:buNone/>
             </a:pPr>
             <a:r>
@@ -1711,7 +1578,7 @@
           <a:bodyPr wrap="square" rtlCol="0" anchor="ctr"/>
           <a:lstStyle/>
           <a:p>
-            <a:pPr algn="ctr" indent="0" marL="0">
+            <a:pPr marL="0" indent="0" algn="ctr">
               <a:buNone/>
             </a:pPr>
             <a:r>
@@ -1753,6 +1620,13 @@
             <a:prstDash val="solid"/>
           </a:ln>
         </p:spPr>
+        <p:txBody>
+          <a:bodyPr/>
+          <a:lstStyle/>
+          <a:p>
+            <a:endParaRPr lang="en-US"/>
+          </a:p>
+        </p:txBody>
       </p:sp>
       <p:sp>
         <p:nvSpPr>
@@ -1775,7 +1649,7 @@
           <a:bodyPr wrap="square" rtlCol="0" anchor="ctr"/>
           <a:lstStyle/>
           <a:p>
-            <a:pPr algn="ctr" indent="0" marL="0">
+            <a:pPr marL="0" indent="0" algn="ctr">
               <a:buNone/>
             </a:pPr>
             <a:r>
@@ -1814,6 +1688,568 @@
             <a:prstDash val="solid"/>
           </a:ln>
         </p:spPr>
+        <p:txBody>
+          <a:bodyPr/>
+          <a:lstStyle/>
+          <a:p>
+            <a:endParaRPr lang="en-US"/>
+          </a:p>
+        </p:txBody>
+      </p:sp>
+    </p:spTree>
+  </p:cSld>
+  <p:clrMapOvr>
+    <a:masterClrMapping/>
+  </p:clrMapOvr>
+</p:sld>
+</file>
+
+<file path=ppt/slides/slide10.xml><?xml version="1.0" encoding="utf-8"?>
+<p:sld xmlns:a="http://schemas.openxmlformats.org/drawingml/2006/main" xmlns:r="http://schemas.openxmlformats.org/officeDocument/2006/relationships" xmlns:p="http://schemas.openxmlformats.org/presentationml/2006/main">
+  <p:cSld name="Slide 9">
+    <p:bg>
+      <p:bgPr>
+        <a:solidFill>
+          <a:srgbClr val="0D1117"/>
+        </a:solidFill>
+        <a:effectLst/>
+      </p:bgPr>
+    </p:bg>
+    <p:spTree>
+      <p:nvGrpSpPr>
+        <p:cNvPr id="1" name=""/>
+        <p:cNvGrpSpPr/>
+        <p:nvPr/>
+      </p:nvGrpSpPr>
+      <p:grpSpPr>
+        <a:xfrm>
+          <a:off x="0" y="0"/>
+          <a:ext cx="0" cy="0"/>
+          <a:chOff x="0" y="0"/>
+          <a:chExt cx="0" cy="0"/>
+        </a:xfrm>
+      </p:grpSpPr>
+      <p:sp>
+        <p:nvSpPr>
+          <p:cNvPr id="2" name="Shape 0"/>
+          <p:cNvSpPr/>
+          <p:nvPr/>
+        </p:nvSpPr>
+        <p:spPr>
+          <a:xfrm>
+            <a:off x="0" y="0"/>
+            <a:ext cx="9144000" cy="54864"/>
+          </a:xfrm>
+          <a:prstGeom prst="rect">
+            <a:avLst/>
+          </a:prstGeom>
+          <a:solidFill>
+            <a:srgbClr val="58A6FF"/>
+          </a:solidFill>
+          <a:ln w="12700">
+            <a:solidFill>
+              <a:srgbClr val="58A6FF"/>
+            </a:solidFill>
+            <a:prstDash val="solid"/>
+          </a:ln>
+        </p:spPr>
+        <p:txBody>
+          <a:bodyPr/>
+          <a:lstStyle/>
+          <a:p>
+            <a:endParaRPr lang="en-US"/>
+          </a:p>
+        </p:txBody>
+      </p:sp>
+      <p:sp>
+        <p:nvSpPr>
+          <p:cNvPr id="3" name="Text 1"/>
+          <p:cNvSpPr/>
+          <p:nvPr/>
+        </p:nvSpPr>
+        <p:spPr>
+          <a:xfrm>
+            <a:off x="457200" y="822960"/>
+            <a:ext cx="8229600" cy="1097280"/>
+          </a:xfrm>
+          <a:prstGeom prst="rect">
+            <a:avLst/>
+          </a:prstGeom>
+          <a:noFill/>
+          <a:ln/>
+        </p:spPr>
+        <p:txBody>
+          <a:bodyPr wrap="square" rtlCol="0" anchor="ctr"/>
+          <a:lstStyle/>
+          <a:p>
+            <a:pPr marL="0" indent="0" algn="ctr">
+              <a:buNone/>
+            </a:pPr>
+            <a:r>
+              <a:rPr lang="en-US" sz="6400" b="1" kern="0" spc="400" dirty="0">
+                <a:solidFill>
+                  <a:srgbClr val="58A6FF"/>
+                </a:solidFill>
+                <a:latin typeface="Consolas" pitchFamily="34" charset="0"/>
+                <a:ea typeface="Consolas" pitchFamily="34" charset="-122"/>
+                <a:cs typeface="Consolas" pitchFamily="34" charset="-120"/>
+              </a:rPr>
+              <a:t>Thank You</a:t>
+            </a:r>
+            <a:endParaRPr lang="en-US" sz="6400" dirty="0"/>
+          </a:p>
+        </p:txBody>
+      </p:sp>
+      <p:sp>
+        <p:nvSpPr>
+          <p:cNvPr id="4" name="Text 2"/>
+          <p:cNvSpPr/>
+          <p:nvPr/>
+        </p:nvSpPr>
+        <p:spPr>
+          <a:xfrm>
+            <a:off x="457200" y="2011680"/>
+            <a:ext cx="8229600" cy="548640"/>
+          </a:xfrm>
+          <a:prstGeom prst="rect">
+            <a:avLst/>
+          </a:prstGeom>
+          <a:noFill/>
+          <a:ln/>
+        </p:spPr>
+        <p:txBody>
+          <a:bodyPr wrap="square" rtlCol="0" anchor="ctr"/>
+          <a:lstStyle/>
+          <a:p>
+            <a:pPr marL="0" indent="0" algn="ctr">
+              <a:buNone/>
+            </a:pPr>
+            <a:r>
+              <a:rPr lang="en-US" sz="2200" dirty="0">
+                <a:solidFill>
+                  <a:srgbClr val="7D8590"/>
+                </a:solidFill>
+                <a:latin typeface="Calibri" pitchFamily="34" charset="0"/>
+                <a:ea typeface="Calibri" pitchFamily="34" charset="-122"/>
+                <a:cs typeface="Calibri" pitchFamily="34" charset="-120"/>
+              </a:rPr>
+              <a:t>Questions &amp; Discussion</a:t>
+            </a:r>
+            <a:endParaRPr lang="en-US" sz="2200" dirty="0"/>
+          </a:p>
+        </p:txBody>
+      </p:sp>
+      <p:sp>
+        <p:nvSpPr>
+          <p:cNvPr id="5" name="Shape 3"/>
+          <p:cNvSpPr/>
+          <p:nvPr/>
+        </p:nvSpPr>
+        <p:spPr>
+          <a:xfrm>
+            <a:off x="2743200" y="2651760"/>
+            <a:ext cx="3657600" cy="36576"/>
+          </a:xfrm>
+          <a:prstGeom prst="rect">
+            <a:avLst/>
+          </a:prstGeom>
+          <a:solidFill>
+            <a:srgbClr val="30363D"/>
+          </a:solidFill>
+          <a:ln w="12700">
+            <a:solidFill>
+              <a:srgbClr val="30363D"/>
+            </a:solidFill>
+            <a:prstDash val="solid"/>
+          </a:ln>
+        </p:spPr>
+        <p:txBody>
+          <a:bodyPr/>
+          <a:lstStyle/>
+          <a:p>
+            <a:endParaRPr lang="en-US"/>
+          </a:p>
+        </p:txBody>
+      </p:sp>
+      <p:sp>
+        <p:nvSpPr>
+          <p:cNvPr id="6" name="Text 4"/>
+          <p:cNvSpPr/>
+          <p:nvPr/>
+        </p:nvSpPr>
+        <p:spPr>
+          <a:xfrm>
+            <a:off x="914400" y="2926080"/>
+            <a:ext cx="1645920" cy="731520"/>
+          </a:xfrm>
+          <a:prstGeom prst="rect">
+            <a:avLst/>
+          </a:prstGeom>
+          <a:noFill/>
+          <a:ln/>
+        </p:spPr>
+        <p:txBody>
+          <a:bodyPr wrap="square" rtlCol="0" anchor="ctr"/>
+          <a:lstStyle/>
+          <a:p>
+            <a:pPr marL="0" indent="0" algn="ctr">
+              <a:buNone/>
+            </a:pPr>
+            <a:r>
+              <a:rPr lang="en-US" sz="3600" b="1" dirty="0">
+                <a:solidFill>
+                  <a:srgbClr val="58A6FF"/>
+                </a:solidFill>
+                <a:latin typeface="Consolas" pitchFamily="34" charset="0"/>
+                <a:ea typeface="Consolas" pitchFamily="34" charset="-122"/>
+                <a:cs typeface="Consolas" pitchFamily="34" charset="-120"/>
+              </a:rPr>
+              <a:t>30</a:t>
+            </a:r>
+            <a:endParaRPr lang="en-US" sz="3600" dirty="0"/>
+          </a:p>
+        </p:txBody>
+      </p:sp>
+      <p:sp>
+        <p:nvSpPr>
+          <p:cNvPr id="7" name="Text 5"/>
+          <p:cNvSpPr/>
+          <p:nvPr/>
+        </p:nvSpPr>
+        <p:spPr>
+          <a:xfrm>
+            <a:off x="914400" y="3657600"/>
+            <a:ext cx="1645920" cy="365760"/>
+          </a:xfrm>
+          <a:prstGeom prst="rect">
+            <a:avLst/>
+          </a:prstGeom>
+          <a:noFill/>
+          <a:ln/>
+        </p:spPr>
+        <p:txBody>
+          <a:bodyPr wrap="square" rtlCol="0" anchor="ctr"/>
+          <a:lstStyle/>
+          <a:p>
+            <a:pPr marL="0" indent="0" algn="ctr">
+              <a:buNone/>
+            </a:pPr>
+            <a:r>
+              <a:rPr lang="en-US" sz="1300" dirty="0">
+                <a:solidFill>
+                  <a:srgbClr val="7D8590"/>
+                </a:solidFill>
+                <a:latin typeface="Calibri" pitchFamily="34" charset="0"/>
+                <a:ea typeface="Calibri" pitchFamily="34" charset="-122"/>
+                <a:cs typeface="Calibri" pitchFamily="34" charset="-120"/>
+              </a:rPr>
+              <a:t>Questions</a:t>
+            </a:r>
+            <a:endParaRPr lang="en-US" sz="1300" dirty="0"/>
+          </a:p>
+        </p:txBody>
+      </p:sp>
+      <p:sp>
+        <p:nvSpPr>
+          <p:cNvPr id="8" name="Text 6"/>
+          <p:cNvSpPr/>
+          <p:nvPr/>
+        </p:nvSpPr>
+        <p:spPr>
+          <a:xfrm>
+            <a:off x="2834640" y="2926080"/>
+            <a:ext cx="1645920" cy="731520"/>
+          </a:xfrm>
+          <a:prstGeom prst="rect">
+            <a:avLst/>
+          </a:prstGeom>
+          <a:noFill/>
+          <a:ln/>
+        </p:spPr>
+        <p:txBody>
+          <a:bodyPr wrap="square" rtlCol="0" anchor="ctr"/>
+          <a:lstStyle/>
+          <a:p>
+            <a:pPr marL="0" indent="0" algn="ctr">
+              <a:buNone/>
+            </a:pPr>
+            <a:r>
+              <a:rPr lang="en-US" sz="3600" b="1" dirty="0">
+                <a:solidFill>
+                  <a:srgbClr val="58A6FF"/>
+                </a:solidFill>
+                <a:latin typeface="Consolas" pitchFamily="34" charset="0"/>
+                <a:ea typeface="Consolas" pitchFamily="34" charset="-122"/>
+                <a:cs typeface="Consolas" pitchFamily="34" charset="-120"/>
+              </a:rPr>
+              <a:t>8</a:t>
+            </a:r>
+            <a:endParaRPr lang="en-US" sz="3600" dirty="0"/>
+          </a:p>
+        </p:txBody>
+      </p:sp>
+      <p:sp>
+        <p:nvSpPr>
+          <p:cNvPr id="9" name="Text 7"/>
+          <p:cNvSpPr/>
+          <p:nvPr/>
+        </p:nvSpPr>
+        <p:spPr>
+          <a:xfrm>
+            <a:off x="2834640" y="3657600"/>
+            <a:ext cx="1645920" cy="365760"/>
+          </a:xfrm>
+          <a:prstGeom prst="rect">
+            <a:avLst/>
+          </a:prstGeom>
+          <a:noFill/>
+          <a:ln/>
+        </p:spPr>
+        <p:txBody>
+          <a:bodyPr wrap="square" rtlCol="0" anchor="ctr"/>
+          <a:lstStyle/>
+          <a:p>
+            <a:pPr marL="0" indent="0" algn="ctr">
+              <a:buNone/>
+            </a:pPr>
+            <a:r>
+              <a:rPr lang="en-US" sz="1300" dirty="0">
+                <a:solidFill>
+                  <a:srgbClr val="7D8590"/>
+                </a:solidFill>
+                <a:latin typeface="Calibri" pitchFamily="34" charset="0"/>
+                <a:ea typeface="Calibri" pitchFamily="34" charset="-122"/>
+                <a:cs typeface="Calibri" pitchFamily="34" charset="-120"/>
+              </a:rPr>
+              <a:t>Source Files</a:t>
+            </a:r>
+            <a:endParaRPr lang="en-US" sz="1300" dirty="0"/>
+          </a:p>
+        </p:txBody>
+      </p:sp>
+      <p:sp>
+        <p:nvSpPr>
+          <p:cNvPr id="10" name="Text 8"/>
+          <p:cNvSpPr/>
+          <p:nvPr/>
+        </p:nvSpPr>
+        <p:spPr>
+          <a:xfrm>
+            <a:off x="4754880" y="2926080"/>
+            <a:ext cx="1645920" cy="731520"/>
+          </a:xfrm>
+          <a:prstGeom prst="rect">
+            <a:avLst/>
+          </a:prstGeom>
+          <a:noFill/>
+          <a:ln/>
+        </p:spPr>
+        <p:txBody>
+          <a:bodyPr wrap="square" rtlCol="0" anchor="ctr"/>
+          <a:lstStyle/>
+          <a:p>
+            <a:pPr marL="0" indent="0" algn="ctr">
+              <a:buNone/>
+            </a:pPr>
+            <a:r>
+              <a:rPr lang="en-US" sz="3600" b="1" dirty="0">
+                <a:solidFill>
+                  <a:srgbClr val="58A6FF"/>
+                </a:solidFill>
+                <a:latin typeface="Consolas" pitchFamily="34" charset="0"/>
+                <a:ea typeface="Consolas" pitchFamily="34" charset="-122"/>
+                <a:cs typeface="Consolas" pitchFamily="34" charset="-120"/>
+              </a:rPr>
+              <a:t>100%</a:t>
+            </a:r>
+            <a:endParaRPr lang="en-US" sz="3600" dirty="0"/>
+          </a:p>
+        </p:txBody>
+      </p:sp>
+      <p:sp>
+        <p:nvSpPr>
+          <p:cNvPr id="11" name="Text 9"/>
+          <p:cNvSpPr/>
+          <p:nvPr/>
+        </p:nvSpPr>
+        <p:spPr>
+          <a:xfrm>
+            <a:off x="4754880" y="3657600"/>
+            <a:ext cx="1645920" cy="365760"/>
+          </a:xfrm>
+          <a:prstGeom prst="rect">
+            <a:avLst/>
+          </a:prstGeom>
+          <a:noFill/>
+          <a:ln/>
+        </p:spPr>
+        <p:txBody>
+          <a:bodyPr wrap="square" rtlCol="0" anchor="ctr"/>
+          <a:lstStyle/>
+          <a:p>
+            <a:pPr marL="0" indent="0" algn="ctr">
+              <a:buNone/>
+            </a:pPr>
+            <a:r>
+              <a:rPr lang="en-US" sz="1300" dirty="0">
+                <a:solidFill>
+                  <a:srgbClr val="7D8590"/>
+                </a:solidFill>
+                <a:latin typeface="Calibri" pitchFamily="34" charset="0"/>
+                <a:ea typeface="Calibri" pitchFamily="34" charset="-122"/>
+                <a:cs typeface="Calibri" pitchFamily="34" charset="-120"/>
+              </a:rPr>
+              <a:t>C++</a:t>
+            </a:r>
+            <a:endParaRPr lang="en-US" sz="1300" dirty="0"/>
+          </a:p>
+        </p:txBody>
+      </p:sp>
+      <p:sp>
+        <p:nvSpPr>
+          <p:cNvPr id="12" name="Text 10"/>
+          <p:cNvSpPr/>
+          <p:nvPr/>
+        </p:nvSpPr>
+        <p:spPr>
+          <a:xfrm>
+            <a:off x="6675120" y="2926080"/>
+            <a:ext cx="1645920" cy="731520"/>
+          </a:xfrm>
+          <a:prstGeom prst="rect">
+            <a:avLst/>
+          </a:prstGeom>
+          <a:noFill/>
+          <a:ln/>
+        </p:spPr>
+        <p:txBody>
+          <a:bodyPr wrap="square" rtlCol="0" anchor="ctr"/>
+          <a:lstStyle/>
+          <a:p>
+            <a:pPr marL="0" indent="0" algn="ctr">
+              <a:buNone/>
+            </a:pPr>
+            <a:r>
+              <a:rPr lang="en-US" sz="3600" b="1" dirty="0">
+                <a:solidFill>
+                  <a:srgbClr val="58A6FF"/>
+                </a:solidFill>
+                <a:latin typeface="Consolas" pitchFamily="34" charset="0"/>
+                <a:ea typeface="Consolas" pitchFamily="34" charset="-122"/>
+                <a:cs typeface="Consolas" pitchFamily="34" charset="-120"/>
+              </a:rPr>
+              <a:t>2026</a:t>
+            </a:r>
+            <a:endParaRPr lang="en-US" sz="3600" dirty="0"/>
+          </a:p>
+        </p:txBody>
+      </p:sp>
+      <p:sp>
+        <p:nvSpPr>
+          <p:cNvPr id="13" name="Text 11"/>
+          <p:cNvSpPr/>
+          <p:nvPr/>
+        </p:nvSpPr>
+        <p:spPr>
+          <a:xfrm>
+            <a:off x="6675120" y="3657600"/>
+            <a:ext cx="1645920" cy="365760"/>
+          </a:xfrm>
+          <a:prstGeom prst="rect">
+            <a:avLst/>
+          </a:prstGeom>
+          <a:noFill/>
+          <a:ln/>
+        </p:spPr>
+        <p:txBody>
+          <a:bodyPr wrap="square" rtlCol="0" anchor="ctr"/>
+          <a:lstStyle/>
+          <a:p>
+            <a:pPr marL="0" indent="0" algn="ctr">
+              <a:buNone/>
+            </a:pPr>
+            <a:r>
+              <a:rPr lang="en-US" sz="1300" dirty="0">
+                <a:solidFill>
+                  <a:srgbClr val="7D8590"/>
+                </a:solidFill>
+                <a:latin typeface="Calibri" pitchFamily="34" charset="0"/>
+                <a:ea typeface="Calibri" pitchFamily="34" charset="-122"/>
+                <a:cs typeface="Calibri" pitchFamily="34" charset="-120"/>
+              </a:rPr>
+              <a:t>IX Grade</a:t>
+            </a:r>
+            <a:endParaRPr lang="en-US" sz="1300" dirty="0"/>
+          </a:p>
+        </p:txBody>
+      </p:sp>
+      <p:sp>
+        <p:nvSpPr>
+          <p:cNvPr id="14" name="Text 12"/>
+          <p:cNvSpPr/>
+          <p:nvPr/>
+        </p:nvSpPr>
+        <p:spPr>
+          <a:xfrm>
+            <a:off x="457200" y="4572000"/>
+            <a:ext cx="8229600" cy="320040"/>
+          </a:xfrm>
+          <a:prstGeom prst="rect">
+            <a:avLst/>
+          </a:prstGeom>
+          <a:noFill/>
+          <a:ln/>
+        </p:spPr>
+        <p:txBody>
+          <a:bodyPr wrap="square" rtlCol="0" anchor="ctr"/>
+          <a:lstStyle/>
+          <a:p>
+            <a:pPr marL="0" indent="0" algn="ctr">
+              <a:buNone/>
+            </a:pPr>
+            <a:r>
+              <a:rPr lang="en-US" sz="1100" i="1" dirty="0">
+                <a:solidFill>
+                  <a:srgbClr val="7D8590"/>
+                </a:solidFill>
+              </a:rPr>
+              <a:t>Professional Gymnasium for Computer Programming &amp; Innovations — Burgas  |  2025/2026</a:t>
+            </a:r>
+            <a:endParaRPr lang="en-US" sz="1100" dirty="0"/>
+          </a:p>
+        </p:txBody>
+      </p:sp>
+      <p:sp>
+        <p:nvSpPr>
+          <p:cNvPr id="15" name="Shape 13"/>
+          <p:cNvSpPr/>
+          <p:nvPr/>
+        </p:nvSpPr>
+        <p:spPr>
+          <a:xfrm>
+            <a:off x="0" y="5106924"/>
+            <a:ext cx="9144000" cy="36576"/>
+          </a:xfrm>
+          <a:prstGeom prst="rect">
+            <a:avLst/>
+          </a:prstGeom>
+          <a:solidFill>
+            <a:srgbClr val="58A6FF"/>
+          </a:solidFill>
+          <a:ln w="12700">
+            <a:solidFill>
+              <a:srgbClr val="58A6FF"/>
+            </a:solidFill>
+            <a:prstDash val="solid"/>
+          </a:ln>
+        </p:spPr>
+        <p:txBody>
+          <a:bodyPr/>
+          <a:lstStyle/>
+          <a:p>
+            <a:endParaRPr lang="en-US"/>
+          </a:p>
+        </p:txBody>
       </p:sp>
     </p:spTree>
   </p:cSld>
@@ -1831,6 +2267,7 @@
         <a:solidFill>
           <a:srgbClr val="0D1117"/>
         </a:solidFill>
+        <a:effectLst/>
       </p:bgPr>
     </p:bg>
     <p:spTree>
@@ -1871,6 +2308,13 @@
             <a:prstDash val="solid"/>
           </a:ln>
         </p:spPr>
+        <p:txBody>
+          <a:bodyPr/>
+          <a:lstStyle/>
+          <a:p>
+            <a:endParaRPr lang="en-US"/>
+          </a:p>
+        </p:txBody>
       </p:sp>
       <p:sp>
         <p:nvSpPr>
@@ -1893,7 +2337,7 @@
           <a:bodyPr wrap="square" rtlCol="0" anchor="ctr"/>
           <a:lstStyle/>
           <a:p>
-            <a:pPr indent="0" marL="0">
+            <a:pPr marL="0" indent="0">
               <a:buNone/>
             </a:pPr>
             <a:r>
@@ -1935,6 +2379,13 @@
             <a:prstDash val="solid"/>
           </a:ln>
         </p:spPr>
+        <p:txBody>
+          <a:bodyPr/>
+          <a:lstStyle/>
+          <a:p>
+            <a:endParaRPr lang="en-US"/>
+          </a:p>
+        </p:txBody>
       </p:sp>
       <p:sp>
         <p:nvSpPr>
@@ -1957,7 +2408,7 @@
           <a:bodyPr wrap="square" rtlCol="0" anchor="ctr"/>
           <a:lstStyle/>
           <a:p>
-            <a:pPr indent="0" marL="0">
+            <a:pPr marL="0" indent="0">
               <a:buNone/>
             </a:pPr>
             <a:r>
@@ -1999,13 +2450,20 @@
             <a:prstDash val="solid"/>
           </a:ln>
           <a:effectLst>
-            <a:outerShdw sx="100000" sy="100000" kx="0" ky="0" algn="bl" rotWithShape="0" blurRad="101600" dist="38100" dir="8100000">
+            <a:outerShdw blurRad="101600" dist="38100" dir="8100000" algn="bl" rotWithShape="0">
               <a:srgbClr val="000000">
                 <a:alpha val="30000"/>
               </a:srgbClr>
             </a:outerShdw>
           </a:effectLst>
         </p:spPr>
+        <p:txBody>
+          <a:bodyPr/>
+          <a:lstStyle/>
+          <a:p>
+            <a:endParaRPr lang="en-US"/>
+          </a:p>
+        </p:txBody>
       </p:sp>
       <p:sp>
         <p:nvSpPr>
@@ -2031,6 +2489,13 @@
             <a:prstDash val="solid"/>
           </a:ln>
         </p:spPr>
+        <p:txBody>
+          <a:bodyPr/>
+          <a:lstStyle/>
+          <a:p>
+            <a:endParaRPr lang="en-US"/>
+          </a:p>
+        </p:txBody>
       </p:sp>
       <p:sp>
         <p:nvSpPr>
@@ -2053,7 +2518,7 @@
           <a:bodyPr wrap="square" rtlCol="0" anchor="ctr"/>
           <a:lstStyle/>
           <a:p>
-            <a:pPr indent="0" marL="0">
+            <a:pPr marL="0" indent="0">
               <a:buNone/>
             </a:pPr>
             <a:r>
@@ -2092,7 +2557,7 @@
           <a:bodyPr wrap="square" rtlCol="0" anchor="ctr"/>
           <a:lstStyle/>
           <a:p>
-            <a:pPr indent="0" marL="0">
+            <a:pPr marL="0" indent="0">
               <a:buNone/>
             </a:pPr>
             <a:r>
@@ -2109,7 +2574,7 @@
             <a:endParaRPr lang="en-US" sz="1300" dirty="0"/>
           </a:p>
           <a:p>
-            <a:pPr indent="0" marL="0">
+            <a:pPr marL="0" indent="0">
               <a:buNone/>
             </a:pPr>
             <a:r>
@@ -2126,7 +2591,7 @@
             <a:endParaRPr lang="en-US" sz="1300" dirty="0"/>
           </a:p>
           <a:p>
-            <a:pPr indent="0" marL="0">
+            <a:pPr marL="0" indent="0">
               <a:buNone/>
             </a:pPr>
             <a:r>
@@ -2168,13 +2633,20 @@
             <a:prstDash val="solid"/>
           </a:ln>
           <a:effectLst>
-            <a:outerShdw sx="100000" sy="100000" kx="0" ky="0" algn="bl" rotWithShape="0" blurRad="101600" dist="38100" dir="8100000">
+            <a:outerShdw blurRad="101600" dist="38100" dir="8100000" algn="bl" rotWithShape="0">
               <a:srgbClr val="000000">
                 <a:alpha val="30000"/>
               </a:srgbClr>
             </a:outerShdw>
           </a:effectLst>
         </p:spPr>
+        <p:txBody>
+          <a:bodyPr/>
+          <a:lstStyle/>
+          <a:p>
+            <a:endParaRPr lang="en-US"/>
+          </a:p>
+        </p:txBody>
       </p:sp>
       <p:sp>
         <p:nvSpPr>
@@ -2200,6 +2672,13 @@
             <a:prstDash val="solid"/>
           </a:ln>
         </p:spPr>
+        <p:txBody>
+          <a:bodyPr/>
+          <a:lstStyle/>
+          <a:p>
+            <a:endParaRPr lang="en-US"/>
+          </a:p>
+        </p:txBody>
       </p:sp>
       <p:sp>
         <p:nvSpPr>
@@ -2222,7 +2701,7 @@
           <a:bodyPr wrap="square" rtlCol="0" anchor="ctr"/>
           <a:lstStyle/>
           <a:p>
-            <a:pPr indent="0" marL="0">
+            <a:pPr marL="0" indent="0">
               <a:buNone/>
             </a:pPr>
             <a:r>
@@ -2261,7 +2740,7 @@
           <a:bodyPr wrap="square" rtlCol="0" anchor="ctr"/>
           <a:lstStyle/>
           <a:p>
-            <a:pPr indent="0" marL="0">
+            <a:pPr marL="0" indent="0">
               <a:buNone/>
             </a:pPr>
             <a:r>
@@ -2278,7 +2757,7 @@
             <a:endParaRPr lang="en-US" sz="1300" dirty="0"/>
           </a:p>
           <a:p>
-            <a:pPr indent="0" marL="0">
+            <a:pPr marL="0" indent="0">
               <a:buNone/>
             </a:pPr>
             <a:r>
@@ -2295,7 +2774,7 @@
             <a:endParaRPr lang="en-US" sz="1300" dirty="0"/>
           </a:p>
           <a:p>
-            <a:pPr indent="0" marL="0">
+            <a:pPr marL="0" indent="0">
               <a:buNone/>
             </a:pPr>
             <a:r>
@@ -2337,13 +2816,20 @@
             <a:prstDash val="solid"/>
           </a:ln>
           <a:effectLst>
-            <a:outerShdw sx="100000" sy="100000" kx="0" ky="0" algn="bl" rotWithShape="0" blurRad="101600" dist="38100" dir="8100000">
+            <a:outerShdw blurRad="101600" dist="38100" dir="8100000" algn="bl" rotWithShape="0">
               <a:srgbClr val="000000">
                 <a:alpha val="30000"/>
               </a:srgbClr>
             </a:outerShdw>
           </a:effectLst>
         </p:spPr>
+        <p:txBody>
+          <a:bodyPr/>
+          <a:lstStyle/>
+          <a:p>
+            <a:endParaRPr lang="en-US"/>
+          </a:p>
+        </p:txBody>
       </p:sp>
       <p:sp>
         <p:nvSpPr>
@@ -2369,6 +2855,13 @@
             <a:prstDash val="solid"/>
           </a:ln>
         </p:spPr>
+        <p:txBody>
+          <a:bodyPr/>
+          <a:lstStyle/>
+          <a:p>
+            <a:endParaRPr lang="en-US"/>
+          </a:p>
+        </p:txBody>
       </p:sp>
       <p:sp>
         <p:nvSpPr>
@@ -2391,7 +2884,7 @@
           <a:bodyPr wrap="square" rtlCol="0" anchor="ctr"/>
           <a:lstStyle/>
           <a:p>
-            <a:pPr indent="0" marL="0">
+            <a:pPr marL="0" indent="0">
               <a:buNone/>
             </a:pPr>
             <a:r>
@@ -2430,7 +2923,7 @@
           <a:bodyPr wrap="square" rtlCol="0" anchor="ctr"/>
           <a:lstStyle/>
           <a:p>
-            <a:pPr indent="0" marL="0">
+            <a:pPr marL="0" indent="0">
               <a:buNone/>
             </a:pPr>
             <a:r>
@@ -2447,7 +2940,7 @@
             <a:endParaRPr lang="en-US" sz="1300" dirty="0"/>
           </a:p>
           <a:p>
-            <a:pPr indent="0" marL="0">
+            <a:pPr marL="0" indent="0">
               <a:buNone/>
             </a:pPr>
             <a:r>
@@ -2464,7 +2957,7 @@
             <a:endParaRPr lang="en-US" sz="1300" dirty="0"/>
           </a:p>
           <a:p>
-            <a:pPr indent="0" marL="0">
+            <a:pPr marL="0" indent="0">
               <a:buNone/>
             </a:pPr>
             <a:r>
@@ -2506,6 +2999,13 @@
             <a:prstDash val="solid"/>
           </a:ln>
         </p:spPr>
+        <p:txBody>
+          <a:bodyPr/>
+          <a:lstStyle/>
+          <a:p>
+            <a:endParaRPr lang="en-US"/>
+          </a:p>
+        </p:txBody>
       </p:sp>
     </p:spTree>
   </p:cSld>
@@ -2517,12 +3017,840 @@
 
 <file path=ppt/slides/slide3.xml><?xml version="1.0" encoding="utf-8"?>
 <p:sld xmlns:a="http://schemas.openxmlformats.org/drawingml/2006/main" xmlns:r="http://schemas.openxmlformats.org/officeDocument/2006/relationships" xmlns:p="http://schemas.openxmlformats.org/presentationml/2006/main">
+  <p:cSld>
+    <p:bg>
+      <p:bgPr>
+        <a:solidFill>
+          <a:srgbClr val="0D1117"/>
+        </a:solidFill>
+        <a:effectLst/>
+      </p:bgPr>
+    </p:bg>
+    <p:spTree>
+      <p:nvGrpSpPr>
+        <p:cNvPr id="1" name="">
+          <a:extLst>
+            <a:ext uri="{FF2B5EF4-FFF2-40B4-BE49-F238E27FC236}">
+              <a16:creationId xmlns:a16="http://schemas.microsoft.com/office/drawing/2014/main" id="{4FEE08F0-9AF8-91D4-B22F-475F479FC933}"/>
+            </a:ext>
+          </a:extLst>
+        </p:cNvPr>
+        <p:cNvGrpSpPr/>
+        <p:nvPr/>
+      </p:nvGrpSpPr>
+      <p:grpSpPr>
+        <a:xfrm>
+          <a:off x="0" y="0"/>
+          <a:ext cx="0" cy="0"/>
+          <a:chOff x="0" y="0"/>
+          <a:chExt cx="0" cy="0"/>
+        </a:xfrm>
+      </p:grpSpPr>
+      <p:sp>
+        <p:nvSpPr>
+          <p:cNvPr id="2" name="Shape 0">
+            <a:extLst>
+              <a:ext uri="{FF2B5EF4-FFF2-40B4-BE49-F238E27FC236}">
+                <a16:creationId xmlns:a16="http://schemas.microsoft.com/office/drawing/2014/main" id="{663569A6-91A7-BF16-A00A-A6059BE5FDA7}"/>
+              </a:ext>
+            </a:extLst>
+          </p:cNvPr>
+          <p:cNvSpPr/>
+          <p:nvPr/>
+        </p:nvSpPr>
+        <p:spPr>
+          <a:xfrm>
+            <a:off x="0" y="0"/>
+            <a:ext cx="9144000" cy="54864"/>
+          </a:xfrm>
+          <a:prstGeom prst="rect">
+            <a:avLst/>
+          </a:prstGeom>
+          <a:solidFill>
+            <a:srgbClr val="58A6FF"/>
+          </a:solidFill>
+          <a:ln w="12700">
+            <a:solidFill>
+              <a:srgbClr val="58A6FF"/>
+            </a:solidFill>
+            <a:prstDash val="solid"/>
+          </a:ln>
+        </p:spPr>
+        <p:txBody>
+          <a:bodyPr/>
+          <a:lstStyle/>
+          <a:p>
+            <a:endParaRPr lang="en-US"/>
+          </a:p>
+        </p:txBody>
+      </p:sp>
+      <p:sp>
+        <p:nvSpPr>
+          <p:cNvPr id="3" name="Text 1">
+            <a:extLst>
+              <a:ext uri="{FF2B5EF4-FFF2-40B4-BE49-F238E27FC236}">
+                <a16:creationId xmlns:a16="http://schemas.microsoft.com/office/drawing/2014/main" id="{BCD22CDF-9A35-4995-791F-3668B3E4209F}"/>
+              </a:ext>
+            </a:extLst>
+          </p:cNvPr>
+          <p:cNvSpPr/>
+          <p:nvPr/>
+        </p:nvSpPr>
+        <p:spPr>
+          <a:xfrm>
+            <a:off x="482138" y="105156"/>
+            <a:ext cx="8229600" cy="640080"/>
+          </a:xfrm>
+          <a:prstGeom prst="rect">
+            <a:avLst/>
+          </a:prstGeom>
+          <a:noFill/>
+          <a:ln/>
+        </p:spPr>
+        <p:txBody>
+          <a:bodyPr wrap="square" rtlCol="0" anchor="ctr"/>
+          <a:lstStyle/>
+          <a:p>
+            <a:pPr marL="0" indent="0" algn="ctr">
+              <a:buNone/>
+            </a:pPr>
+            <a:r>
+              <a:rPr lang="en-US" sz="3200" b="1" dirty="0">
+                <a:solidFill>
+                  <a:srgbClr val="E6EDF3"/>
+                </a:solidFill>
+                <a:latin typeface="Calibri" pitchFamily="34" charset="0"/>
+                <a:ea typeface="Calibri" pitchFamily="34" charset="-122"/>
+                <a:cs typeface="Calibri" pitchFamily="34" charset="-120"/>
+              </a:rPr>
+              <a:t>Our team:</a:t>
+            </a:r>
+            <a:endParaRPr lang="en-US" sz="3200" dirty="0"/>
+          </a:p>
+        </p:txBody>
+      </p:sp>
+      <p:sp>
+        <p:nvSpPr>
+          <p:cNvPr id="4" name="Shape 2">
+            <a:extLst>
+              <a:ext uri="{FF2B5EF4-FFF2-40B4-BE49-F238E27FC236}">
+                <a16:creationId xmlns:a16="http://schemas.microsoft.com/office/drawing/2014/main" id="{16B15E37-7CC6-548A-6D9E-9CB8F8801BAD}"/>
+              </a:ext>
+            </a:extLst>
+          </p:cNvPr>
+          <p:cNvSpPr/>
+          <p:nvPr/>
+        </p:nvSpPr>
+        <p:spPr>
+          <a:xfrm>
+            <a:off x="457200" y="777240"/>
+            <a:ext cx="8229600" cy="27432"/>
+          </a:xfrm>
+          <a:prstGeom prst="rect">
+            <a:avLst/>
+          </a:prstGeom>
+          <a:solidFill>
+            <a:srgbClr val="30363D"/>
+          </a:solidFill>
+          <a:ln w="12700">
+            <a:solidFill>
+              <a:srgbClr val="30363D"/>
+            </a:solidFill>
+            <a:prstDash val="solid"/>
+          </a:ln>
+        </p:spPr>
+        <p:txBody>
+          <a:bodyPr/>
+          <a:lstStyle/>
+          <a:p>
+            <a:endParaRPr lang="en-US"/>
+          </a:p>
+        </p:txBody>
+      </p:sp>
+      <p:sp>
+        <p:nvSpPr>
+          <p:cNvPr id="7" name="Shape 5">
+            <a:extLst>
+              <a:ext uri="{FF2B5EF4-FFF2-40B4-BE49-F238E27FC236}">
+                <a16:creationId xmlns:a16="http://schemas.microsoft.com/office/drawing/2014/main" id="{634CBEB2-0BE3-7710-4373-4F0D285A3676}"/>
+              </a:ext>
+            </a:extLst>
+          </p:cNvPr>
+          <p:cNvSpPr/>
+          <p:nvPr/>
+        </p:nvSpPr>
+        <p:spPr>
+          <a:xfrm>
+            <a:off x="170831" y="1623097"/>
+            <a:ext cx="1804700" cy="103296"/>
+          </a:xfrm>
+          <a:prstGeom prst="rect">
+            <a:avLst/>
+          </a:prstGeom>
+          <a:solidFill>
+            <a:srgbClr val="58A6FF"/>
+          </a:solidFill>
+          <a:ln w="12700">
+            <a:solidFill>
+              <a:srgbClr val="58A6FF"/>
+            </a:solidFill>
+            <a:prstDash val="solid"/>
+          </a:ln>
+        </p:spPr>
+        <p:txBody>
+          <a:bodyPr/>
+          <a:lstStyle/>
+          <a:p>
+            <a:endParaRPr lang="en-US"/>
+          </a:p>
+        </p:txBody>
+      </p:sp>
+      <p:sp>
+        <p:nvSpPr>
+          <p:cNvPr id="8" name="Text 6">
+            <a:extLst>
+              <a:ext uri="{FF2B5EF4-FFF2-40B4-BE49-F238E27FC236}">
+                <a16:creationId xmlns:a16="http://schemas.microsoft.com/office/drawing/2014/main" id="{794CD3CB-F639-0A28-8E13-8559D2E1D81A}"/>
+              </a:ext>
+            </a:extLst>
+          </p:cNvPr>
+          <p:cNvSpPr/>
+          <p:nvPr/>
+        </p:nvSpPr>
+        <p:spPr>
+          <a:xfrm>
+            <a:off x="195996" y="1946987"/>
+            <a:ext cx="2286000" cy="411480"/>
+          </a:xfrm>
+          <a:prstGeom prst="rect">
+            <a:avLst/>
+          </a:prstGeom>
+          <a:noFill/>
+          <a:ln/>
+        </p:spPr>
+        <p:txBody>
+          <a:bodyPr wrap="square" rtlCol="0" anchor="ctr"/>
+          <a:lstStyle/>
+          <a:p>
+            <a:pPr marL="0" indent="0">
+              <a:buNone/>
+            </a:pPr>
+            <a:r>
+              <a:rPr lang="en-US" b="1" dirty="0" err="1">
+                <a:solidFill>
+                  <a:schemeClr val="accent1"/>
+                </a:solidFill>
+                <a:latin typeface="Calibri" pitchFamily="34" charset="0"/>
+                <a:cs typeface="Calibri" pitchFamily="34" charset="-120"/>
+              </a:rPr>
+              <a:t>Vilian</a:t>
+            </a:r>
+            <a:r>
+              <a:rPr lang="en-US" b="1" dirty="0">
+                <a:solidFill>
+                  <a:schemeClr val="accent1"/>
+                </a:solidFill>
+                <a:latin typeface="Calibri" pitchFamily="34" charset="0"/>
+                <a:cs typeface="Calibri" pitchFamily="34" charset="-120"/>
+              </a:rPr>
+              <a:t> Ivanov</a:t>
+            </a:r>
+            <a:endParaRPr lang="en-US" sz="1800" dirty="0">
+              <a:solidFill>
+                <a:schemeClr val="accent1"/>
+              </a:solidFill>
+            </a:endParaRPr>
+          </a:p>
+        </p:txBody>
+      </p:sp>
+      <p:sp>
+        <p:nvSpPr>
+          <p:cNvPr id="9" name="Text 7">
+            <a:extLst>
+              <a:ext uri="{FF2B5EF4-FFF2-40B4-BE49-F238E27FC236}">
+                <a16:creationId xmlns:a16="http://schemas.microsoft.com/office/drawing/2014/main" id="{69240C3C-8799-882F-7437-748408E8D798}"/>
+              </a:ext>
+            </a:extLst>
+          </p:cNvPr>
+          <p:cNvSpPr/>
+          <p:nvPr/>
+        </p:nvSpPr>
+        <p:spPr>
+          <a:xfrm>
+            <a:off x="502920" y="2743200"/>
+            <a:ext cx="2286000" cy="1645920"/>
+          </a:xfrm>
+          <a:prstGeom prst="rect">
+            <a:avLst/>
+          </a:prstGeom>
+          <a:noFill/>
+          <a:ln/>
+        </p:spPr>
+        <p:txBody>
+          <a:bodyPr wrap="square" rtlCol="0" anchor="ctr"/>
+          <a:lstStyle/>
+          <a:p>
+            <a:pPr marL="0" indent="0">
+              <a:buNone/>
+            </a:pPr>
+            <a:endParaRPr lang="en-US" sz="1300" dirty="0"/>
+          </a:p>
+        </p:txBody>
+      </p:sp>
+      <p:sp>
+        <p:nvSpPr>
+          <p:cNvPr id="11" name="Shape 9">
+            <a:extLst>
+              <a:ext uri="{FF2B5EF4-FFF2-40B4-BE49-F238E27FC236}">
+                <a16:creationId xmlns:a16="http://schemas.microsoft.com/office/drawing/2014/main" id="{E0A412C0-C1CC-4F3D-9827-F0A66047CB76}"/>
+              </a:ext>
+            </a:extLst>
+          </p:cNvPr>
+          <p:cNvSpPr/>
+          <p:nvPr/>
+        </p:nvSpPr>
+        <p:spPr>
+          <a:xfrm>
+            <a:off x="2481996" y="1623097"/>
+            <a:ext cx="1621110" cy="94771"/>
+          </a:xfrm>
+          <a:prstGeom prst="rect">
+            <a:avLst/>
+          </a:prstGeom>
+          <a:solidFill>
+            <a:srgbClr val="FF0000"/>
+          </a:solidFill>
+          <a:ln w="12700">
+            <a:solidFill>
+              <a:srgbClr val="FF0000"/>
+            </a:solidFill>
+            <a:prstDash val="solid"/>
+          </a:ln>
+        </p:spPr>
+        <p:txBody>
+          <a:bodyPr/>
+          <a:lstStyle/>
+          <a:p>
+            <a:endParaRPr lang="en-US"/>
+          </a:p>
+        </p:txBody>
+      </p:sp>
+      <p:sp>
+        <p:nvSpPr>
+          <p:cNvPr id="12" name="Text 10">
+            <a:extLst>
+              <a:ext uri="{FF2B5EF4-FFF2-40B4-BE49-F238E27FC236}">
+                <a16:creationId xmlns:a16="http://schemas.microsoft.com/office/drawing/2014/main" id="{AF778202-035E-DFA8-268C-1F1FFC30A2F8}"/>
+              </a:ext>
+            </a:extLst>
+          </p:cNvPr>
+          <p:cNvSpPr/>
+          <p:nvPr/>
+        </p:nvSpPr>
+        <p:spPr>
+          <a:xfrm>
+            <a:off x="2436800" y="1944803"/>
+            <a:ext cx="2286000" cy="411480"/>
+          </a:xfrm>
+          <a:prstGeom prst="rect">
+            <a:avLst/>
+          </a:prstGeom>
+          <a:noFill/>
+          <a:ln/>
+        </p:spPr>
+        <p:txBody>
+          <a:bodyPr wrap="square" rtlCol="0" anchor="ctr"/>
+          <a:lstStyle/>
+          <a:p>
+            <a:pPr marL="0" indent="0">
+              <a:buNone/>
+            </a:pPr>
+            <a:r>
+              <a:rPr lang="en-US" b="1" dirty="0">
+                <a:solidFill>
+                  <a:srgbClr val="FF0000"/>
+                </a:solidFill>
+                <a:latin typeface="Calibri" pitchFamily="34" charset="0"/>
+                <a:cs typeface="Calibri" pitchFamily="34" charset="-120"/>
+              </a:rPr>
+              <a:t>Todor Neshev</a:t>
+            </a:r>
+            <a:endParaRPr lang="en-US" sz="1800" dirty="0">
+              <a:solidFill>
+                <a:srgbClr val="FF0000"/>
+              </a:solidFill>
+            </a:endParaRPr>
+          </a:p>
+        </p:txBody>
+      </p:sp>
+      <p:sp>
+        <p:nvSpPr>
+          <p:cNvPr id="13" name="Text 11">
+            <a:extLst>
+              <a:ext uri="{FF2B5EF4-FFF2-40B4-BE49-F238E27FC236}">
+                <a16:creationId xmlns:a16="http://schemas.microsoft.com/office/drawing/2014/main" id="{65BB1A79-61BC-0833-4400-7DF0F16516C1}"/>
+              </a:ext>
+            </a:extLst>
+          </p:cNvPr>
+          <p:cNvSpPr/>
+          <p:nvPr/>
+        </p:nvSpPr>
+        <p:spPr>
+          <a:xfrm>
+            <a:off x="3337560" y="2743200"/>
+            <a:ext cx="2286000" cy="1645920"/>
+          </a:xfrm>
+          <a:prstGeom prst="rect">
+            <a:avLst/>
+          </a:prstGeom>
+          <a:noFill/>
+          <a:ln/>
+        </p:spPr>
+        <p:txBody>
+          <a:bodyPr wrap="square" rtlCol="0" anchor="ctr"/>
+          <a:lstStyle/>
+          <a:p>
+            <a:pPr marL="0" indent="0">
+              <a:buNone/>
+            </a:pPr>
+            <a:endParaRPr lang="en-US" sz="1300" dirty="0"/>
+          </a:p>
+        </p:txBody>
+      </p:sp>
+      <p:sp>
+        <p:nvSpPr>
+          <p:cNvPr id="15" name="Shape 13">
+            <a:extLst>
+              <a:ext uri="{FF2B5EF4-FFF2-40B4-BE49-F238E27FC236}">
+                <a16:creationId xmlns:a16="http://schemas.microsoft.com/office/drawing/2014/main" id="{A37A3219-4804-9BB4-FCD2-E75C2B843EC6}"/>
+              </a:ext>
+            </a:extLst>
+          </p:cNvPr>
+          <p:cNvSpPr/>
+          <p:nvPr/>
+        </p:nvSpPr>
+        <p:spPr>
+          <a:xfrm>
+            <a:off x="4561169" y="1658380"/>
+            <a:ext cx="2033300" cy="62254"/>
+          </a:xfrm>
+          <a:prstGeom prst="rect">
+            <a:avLst/>
+          </a:prstGeom>
+          <a:solidFill>
+            <a:srgbClr val="FFFF00"/>
+          </a:solidFill>
+          <a:ln w="12700">
+            <a:solidFill>
+              <a:srgbClr val="FFFF00"/>
+            </a:solidFill>
+            <a:prstDash val="solid"/>
+          </a:ln>
+        </p:spPr>
+        <p:txBody>
+          <a:bodyPr/>
+          <a:lstStyle/>
+          <a:p>
+            <a:endParaRPr lang="en-US"/>
+          </a:p>
+        </p:txBody>
+      </p:sp>
+      <p:sp>
+        <p:nvSpPr>
+          <p:cNvPr id="16" name="Text 14">
+            <a:extLst>
+              <a:ext uri="{FF2B5EF4-FFF2-40B4-BE49-F238E27FC236}">
+                <a16:creationId xmlns:a16="http://schemas.microsoft.com/office/drawing/2014/main" id="{51FEDDEA-B502-2787-8373-61A6C55CF02E}"/>
+              </a:ext>
+            </a:extLst>
+          </p:cNvPr>
+          <p:cNvSpPr/>
+          <p:nvPr/>
+        </p:nvSpPr>
+        <p:spPr>
+          <a:xfrm>
+            <a:off x="4561169" y="1944497"/>
+            <a:ext cx="2286000" cy="411480"/>
+          </a:xfrm>
+          <a:prstGeom prst="rect">
+            <a:avLst/>
+          </a:prstGeom>
+          <a:noFill/>
+          <a:ln/>
+        </p:spPr>
+        <p:txBody>
+          <a:bodyPr wrap="square" rtlCol="0" anchor="ctr"/>
+          <a:lstStyle/>
+          <a:p>
+            <a:pPr marL="0" indent="0">
+              <a:buNone/>
+            </a:pPr>
+            <a:r>
+              <a:rPr lang="en-US" b="1" dirty="0">
+                <a:solidFill>
+                  <a:srgbClr val="FFFF00"/>
+                </a:solidFill>
+                <a:latin typeface="Calibri" pitchFamily="34" charset="0"/>
+                <a:cs typeface="Calibri" pitchFamily="34" charset="-120"/>
+              </a:rPr>
+              <a:t>Dara </a:t>
+            </a:r>
+            <a:r>
+              <a:rPr lang="en-US" b="1" dirty="0" err="1">
+                <a:solidFill>
+                  <a:srgbClr val="FFFF00"/>
+                </a:solidFill>
+                <a:latin typeface="Calibri" pitchFamily="34" charset="0"/>
+                <a:cs typeface="Calibri" pitchFamily="34" charset="-120"/>
+              </a:rPr>
+              <a:t>Sokrateva</a:t>
+            </a:r>
+            <a:endParaRPr lang="en-US" sz="1800" dirty="0">
+              <a:solidFill>
+                <a:srgbClr val="FFFF00"/>
+              </a:solidFill>
+            </a:endParaRPr>
+          </a:p>
+        </p:txBody>
+      </p:sp>
+      <p:sp>
+        <p:nvSpPr>
+          <p:cNvPr id="18" name="Shape 16">
+            <a:extLst>
+              <a:ext uri="{FF2B5EF4-FFF2-40B4-BE49-F238E27FC236}">
+                <a16:creationId xmlns:a16="http://schemas.microsoft.com/office/drawing/2014/main" id="{4E7BC148-0C13-CA75-47B8-BD76B637DE99}"/>
+              </a:ext>
+            </a:extLst>
+          </p:cNvPr>
+          <p:cNvSpPr/>
+          <p:nvPr/>
+        </p:nvSpPr>
+        <p:spPr>
+          <a:xfrm>
+            <a:off x="0" y="5106924"/>
+            <a:ext cx="9144000" cy="36576"/>
+          </a:xfrm>
+          <a:prstGeom prst="rect">
+            <a:avLst/>
+          </a:prstGeom>
+          <a:solidFill>
+            <a:srgbClr val="58A6FF"/>
+          </a:solidFill>
+          <a:ln w="12700">
+            <a:solidFill>
+              <a:srgbClr val="58A6FF"/>
+            </a:solidFill>
+            <a:prstDash val="solid"/>
+          </a:ln>
+        </p:spPr>
+        <p:txBody>
+          <a:bodyPr/>
+          <a:lstStyle/>
+          <a:p>
+            <a:endParaRPr lang="en-US"/>
+          </a:p>
+        </p:txBody>
+      </p:sp>
+      <p:pic>
+        <p:nvPicPr>
+          <p:cNvPr id="1030" name="Picture 6">
+            <a:extLst>
+              <a:ext uri="{FF2B5EF4-FFF2-40B4-BE49-F238E27FC236}">
+                <a16:creationId xmlns:a16="http://schemas.microsoft.com/office/drawing/2014/main" id="{1D23504A-096A-B8FA-6211-EC05C3D70AF1}"/>
+              </a:ext>
+            </a:extLst>
+          </p:cNvPr>
+          <p:cNvPicPr>
+            <a:picLocks noChangeAspect="1" noChangeArrowheads="1"/>
+          </p:cNvPicPr>
+          <p:nvPr/>
+        </p:nvPicPr>
+        <p:blipFill>
+          <a:blip r:embed="rId3">
+            <a:extLst>
+              <a:ext uri="{28A0092B-C50C-407E-A947-70E740481C1C}">
+                <a14:useLocalDpi xmlns:a14="http://schemas.microsoft.com/office/drawing/2010/main" val="0"/>
+              </a:ext>
+            </a:extLst>
+          </a:blip>
+          <a:srcRect/>
+          <a:stretch>
+            <a:fillRect/>
+          </a:stretch>
+        </p:blipFill>
+        <p:spPr bwMode="auto">
+          <a:xfrm>
+            <a:off x="195996" y="2571177"/>
+            <a:ext cx="1804700" cy="1839585"/>
+          </a:xfrm>
+          <a:prstGeom prst="rect">
+            <a:avLst/>
+          </a:prstGeom>
+          <a:noFill/>
+          <a:extLst>
+            <a:ext uri="{909E8E84-426E-40DD-AFC4-6F175D3DCCD1}">
+              <a14:hiddenFill xmlns:a14="http://schemas.microsoft.com/office/drawing/2010/main">
+                <a:solidFill>
+                  <a:srgbClr val="FFFFFF"/>
+                </a:solidFill>
+              </a14:hiddenFill>
+            </a:ext>
+          </a:extLst>
+        </p:spPr>
+      </p:pic>
+      <p:pic>
+        <p:nvPicPr>
+          <p:cNvPr id="1032" name="Picture 8">
+            <a:extLst>
+              <a:ext uri="{FF2B5EF4-FFF2-40B4-BE49-F238E27FC236}">
+                <a16:creationId xmlns:a16="http://schemas.microsoft.com/office/drawing/2014/main" id="{9E0ADBD6-2B4E-1DF3-88FE-DD3746CE7CAD}"/>
+              </a:ext>
+            </a:extLst>
+          </p:cNvPr>
+          <p:cNvPicPr>
+            <a:picLocks noChangeAspect="1" noChangeArrowheads="1"/>
+          </p:cNvPicPr>
+          <p:nvPr/>
+        </p:nvPicPr>
+        <p:blipFill>
+          <a:blip r:embed="rId4">
+            <a:extLst>
+              <a:ext uri="{28A0092B-C50C-407E-A947-70E740481C1C}">
+                <a14:useLocalDpi xmlns:a14="http://schemas.microsoft.com/office/drawing/2010/main" val="0"/>
+              </a:ext>
+            </a:extLst>
+          </a:blip>
+          <a:srcRect/>
+          <a:stretch>
+            <a:fillRect/>
+          </a:stretch>
+        </p:blipFill>
+        <p:spPr bwMode="auto">
+          <a:xfrm>
+            <a:off x="2436800" y="2536293"/>
+            <a:ext cx="1636224" cy="1874470"/>
+          </a:xfrm>
+          <a:prstGeom prst="rect">
+            <a:avLst/>
+          </a:prstGeom>
+          <a:noFill/>
+          <a:extLst>
+            <a:ext uri="{909E8E84-426E-40DD-AFC4-6F175D3DCCD1}">
+              <a14:hiddenFill xmlns:a14="http://schemas.microsoft.com/office/drawing/2010/main">
+                <a:solidFill>
+                  <a:srgbClr val="FFFFFF"/>
+                </a:solidFill>
+              </a14:hiddenFill>
+            </a:ext>
+          </a:extLst>
+        </p:spPr>
+      </p:pic>
+      <p:pic>
+        <p:nvPicPr>
+          <p:cNvPr id="1036" name="Picture 12" descr="Open photo">
+            <a:extLst>
+              <a:ext uri="{FF2B5EF4-FFF2-40B4-BE49-F238E27FC236}">
+                <a16:creationId xmlns:a16="http://schemas.microsoft.com/office/drawing/2014/main" id="{1A0302B7-BA8C-DE99-F5FE-5D01E3A04E21}"/>
+              </a:ext>
+            </a:extLst>
+          </p:cNvPr>
+          <p:cNvPicPr>
+            <a:picLocks noChangeAspect="1" noChangeArrowheads="1"/>
+          </p:cNvPicPr>
+          <p:nvPr/>
+        </p:nvPicPr>
+        <p:blipFill>
+          <a:blip r:embed="rId5">
+            <a:extLst>
+              <a:ext uri="{28A0092B-C50C-407E-A947-70E740481C1C}">
+                <a14:useLocalDpi xmlns:a14="http://schemas.microsoft.com/office/drawing/2010/main" val="0"/>
+              </a:ext>
+            </a:extLst>
+          </a:blip>
+          <a:srcRect/>
+          <a:stretch>
+            <a:fillRect/>
+          </a:stretch>
+        </p:blipFill>
+        <p:spPr bwMode="auto">
+          <a:xfrm>
+            <a:off x="4596938" y="2536293"/>
+            <a:ext cx="1927382" cy="1874470"/>
+          </a:xfrm>
+          <a:prstGeom prst="rect">
+            <a:avLst/>
+          </a:prstGeom>
+          <a:noFill/>
+          <a:extLst>
+            <a:ext uri="{909E8E84-426E-40DD-AFC4-6F175D3DCCD1}">
+              <a14:hiddenFill xmlns:a14="http://schemas.microsoft.com/office/drawing/2010/main">
+                <a:solidFill>
+                  <a:srgbClr val="FFFFFF"/>
+                </a:solidFill>
+              </a14:hiddenFill>
+            </a:ext>
+          </a:extLst>
+        </p:spPr>
+      </p:pic>
+      <p:sp>
+        <p:nvSpPr>
+          <p:cNvPr id="19" name="Shape 5">
+            <a:extLst>
+              <a:ext uri="{FF2B5EF4-FFF2-40B4-BE49-F238E27FC236}">
+                <a16:creationId xmlns:a16="http://schemas.microsoft.com/office/drawing/2014/main" id="{8B987C1E-3A69-35B5-1B81-39BB8645A983}"/>
+              </a:ext>
+            </a:extLst>
+          </p:cNvPr>
+          <p:cNvSpPr/>
+          <p:nvPr/>
+        </p:nvSpPr>
+        <p:spPr>
+          <a:xfrm>
+            <a:off x="7059082" y="1675364"/>
+            <a:ext cx="2000316" cy="102057"/>
+          </a:xfrm>
+          <a:prstGeom prst="rect">
+            <a:avLst/>
+          </a:prstGeom>
+          <a:solidFill>
+            <a:srgbClr val="58A6FF"/>
+          </a:solidFill>
+          <a:ln w="12700">
+            <a:solidFill>
+              <a:srgbClr val="58A6FF"/>
+            </a:solidFill>
+            <a:prstDash val="solid"/>
+          </a:ln>
+        </p:spPr>
+        <p:txBody>
+          <a:bodyPr/>
+          <a:lstStyle/>
+          <a:p>
+            <a:endParaRPr lang="en-US" dirty="0"/>
+          </a:p>
+        </p:txBody>
+      </p:sp>
+      <p:pic>
+        <p:nvPicPr>
+          <p:cNvPr id="1038" name="Picture 14" descr="Open photo">
+            <a:extLst>
+              <a:ext uri="{FF2B5EF4-FFF2-40B4-BE49-F238E27FC236}">
+                <a16:creationId xmlns:a16="http://schemas.microsoft.com/office/drawing/2014/main" id="{3A5F3115-DDB5-0D8E-82B7-DB05448E737F}"/>
+              </a:ext>
+            </a:extLst>
+          </p:cNvPr>
+          <p:cNvPicPr>
+            <a:picLocks noChangeAspect="1" noChangeArrowheads="1"/>
+          </p:cNvPicPr>
+          <p:nvPr/>
+        </p:nvPicPr>
+        <p:blipFill>
+          <a:blip r:embed="rId6">
+            <a:extLst>
+              <a:ext uri="{28A0092B-C50C-407E-A947-70E740481C1C}">
+                <a14:useLocalDpi xmlns:a14="http://schemas.microsoft.com/office/drawing/2010/main" val="0"/>
+              </a:ext>
+            </a:extLst>
+          </a:blip>
+          <a:srcRect/>
+          <a:stretch>
+            <a:fillRect/>
+          </a:stretch>
+        </p:blipFill>
+        <p:spPr bwMode="auto">
+          <a:xfrm>
+            <a:off x="7145311" y="2508467"/>
+            <a:ext cx="1991868" cy="1902296"/>
+          </a:xfrm>
+          <a:prstGeom prst="rect">
+            <a:avLst/>
+          </a:prstGeom>
+          <a:noFill/>
+          <a:extLst>
+            <a:ext uri="{909E8E84-426E-40DD-AFC4-6F175D3DCCD1}">
+              <a14:hiddenFill xmlns:a14="http://schemas.microsoft.com/office/drawing/2010/main">
+                <a:solidFill>
+                  <a:srgbClr val="FFFFFF"/>
+                </a:solidFill>
+              </a14:hiddenFill>
+            </a:ext>
+          </a:extLst>
+        </p:spPr>
+      </p:pic>
+      <p:sp>
+        <p:nvSpPr>
+          <p:cNvPr id="20" name="TextBox 19">
+            <a:extLst>
+              <a:ext uri="{FF2B5EF4-FFF2-40B4-BE49-F238E27FC236}">
+                <a16:creationId xmlns:a16="http://schemas.microsoft.com/office/drawing/2014/main" id="{653FAE62-0330-2FA9-5C6B-5BCA49AD4041}"/>
+              </a:ext>
+            </a:extLst>
+          </p:cNvPr>
+          <p:cNvSpPr txBox="1"/>
+          <p:nvPr/>
+        </p:nvSpPr>
+        <p:spPr>
+          <a:xfrm>
+            <a:off x="7145311" y="1965571"/>
+            <a:ext cx="1914087" cy="369332"/>
+          </a:xfrm>
+          <a:prstGeom prst="rect">
+            <a:avLst/>
+          </a:prstGeom>
+          <a:noFill/>
+        </p:spPr>
+        <p:txBody>
+          <a:bodyPr wrap="square" rtlCol="0">
+            <a:spAutoFit/>
+          </a:bodyPr>
+          <a:lstStyle/>
+          <a:p>
+            <a:r>
+              <a:rPr lang="en-US" dirty="0">
+                <a:solidFill>
+                  <a:schemeClr val="accent1"/>
+                </a:solidFill>
+              </a:rPr>
+              <a:t>Mihail </a:t>
+            </a:r>
+            <a:r>
+              <a:rPr lang="en-US" dirty="0" err="1">
+                <a:solidFill>
+                  <a:schemeClr val="accent1"/>
+                </a:solidFill>
+              </a:rPr>
+              <a:t>Mavrodiev</a:t>
+            </a:r>
+            <a:endParaRPr lang="en-US" dirty="0">
+              <a:solidFill>
+                <a:schemeClr val="accent1"/>
+              </a:solidFill>
+            </a:endParaRPr>
+          </a:p>
+        </p:txBody>
+      </p:sp>
+    </p:spTree>
+    <p:extLst>
+      <p:ext uri="{BB962C8B-B14F-4D97-AF65-F5344CB8AC3E}">
+        <p14:creationId xmlns:p14="http://schemas.microsoft.com/office/powerpoint/2010/main" val="415163015"/>
+      </p:ext>
+    </p:extLst>
+  </p:cSld>
+  <p:clrMapOvr>
+    <a:masterClrMapping/>
+  </p:clrMapOvr>
+</p:sld>
+</file>
+
+<file path=ppt/slides/slide4.xml><?xml version="1.0" encoding="utf-8"?>
+<p:sld xmlns:a="http://schemas.openxmlformats.org/drawingml/2006/main" xmlns:r="http://schemas.openxmlformats.org/officeDocument/2006/relationships" xmlns:p="http://schemas.openxmlformats.org/presentationml/2006/main">
   <p:cSld name="Slide 3">
     <p:bg>
       <p:bgPr>
         <a:solidFill>
           <a:srgbClr val="0D1117"/>
         </a:solidFill>
+        <a:effectLst/>
       </p:bgPr>
     </p:bg>
     <p:spTree>
@@ -2563,6 +3891,13 @@
             <a:prstDash val="solid"/>
           </a:ln>
         </p:spPr>
+        <p:txBody>
+          <a:bodyPr/>
+          <a:lstStyle/>
+          <a:p>
+            <a:endParaRPr lang="en-US"/>
+          </a:p>
+        </p:txBody>
       </p:sp>
       <p:sp>
         <p:nvSpPr>
@@ -2585,7 +3920,7 @@
           <a:bodyPr wrap="square" rtlCol="0" anchor="ctr"/>
           <a:lstStyle/>
           <a:p>
-            <a:pPr indent="0" marL="0">
+            <a:pPr marL="0" indent="0">
               <a:buNone/>
             </a:pPr>
             <a:r>
@@ -2627,6 +3962,13 @@
             <a:prstDash val="solid"/>
           </a:ln>
         </p:spPr>
+        <p:txBody>
+          <a:bodyPr/>
+          <a:lstStyle/>
+          <a:p>
+            <a:endParaRPr lang="en-US"/>
+          </a:p>
+        </p:txBody>
       </p:sp>
       <p:sp>
         <p:nvSpPr>
@@ -2649,7 +3991,7 @@
           <a:bodyPr wrap="square" rtlCol="0" anchor="ctr"/>
           <a:lstStyle/>
           <a:p>
-            <a:pPr indent="0" marL="0">
+            <a:pPr marL="0" indent="0">
               <a:buNone/>
             </a:pPr>
             <a:r>
@@ -2691,6 +4033,13 @@
             <a:prstDash val="solid"/>
           </a:ln>
         </p:spPr>
+        <p:txBody>
+          <a:bodyPr/>
+          <a:lstStyle/>
+          <a:p>
+            <a:endParaRPr lang="en-US"/>
+          </a:p>
+        </p:txBody>
       </p:sp>
       <p:sp>
         <p:nvSpPr>
@@ -2713,7 +4062,7 @@
           <a:bodyPr wrap="square" rtlCol="0" anchor="ctr"/>
           <a:lstStyle/>
           <a:p>
-            <a:pPr indent="0" marL="0">
+            <a:pPr marL="0" indent="0">
               <a:buNone/>
             </a:pPr>
             <a:r>
@@ -2752,7 +4101,7 @@
           <a:bodyPr wrap="square" rtlCol="0" anchor="ctr"/>
           <a:lstStyle/>
           <a:p>
-            <a:pPr indent="0" marL="0">
+            <a:pPr marL="0" indent="0">
               <a:buNone/>
             </a:pPr>
             <a:r>
@@ -2794,6 +4143,13 @@
             <a:prstDash val="solid"/>
           </a:ln>
         </p:spPr>
+        <p:txBody>
+          <a:bodyPr/>
+          <a:lstStyle/>
+          <a:p>
+            <a:endParaRPr lang="en-US"/>
+          </a:p>
+        </p:txBody>
       </p:sp>
       <p:sp>
         <p:nvSpPr>
@@ -2816,7 +4172,7 @@
           <a:bodyPr wrap="square" rtlCol="0" anchor="ctr"/>
           <a:lstStyle/>
           <a:p>
-            <a:pPr indent="0" marL="0">
+            <a:pPr marL="0" indent="0">
               <a:buNone/>
             </a:pPr>
             <a:r>
@@ -2855,7 +4211,7 @@
           <a:bodyPr wrap="square" rtlCol="0" anchor="ctr"/>
           <a:lstStyle/>
           <a:p>
-            <a:pPr indent="0" marL="0">
+            <a:pPr marL="0" indent="0">
               <a:buNone/>
             </a:pPr>
             <a:r>
@@ -2897,6 +4253,13 @@
             <a:prstDash val="solid"/>
           </a:ln>
         </p:spPr>
+        <p:txBody>
+          <a:bodyPr/>
+          <a:lstStyle/>
+          <a:p>
+            <a:endParaRPr lang="en-US"/>
+          </a:p>
+        </p:txBody>
       </p:sp>
       <p:sp>
         <p:nvSpPr>
@@ -2919,7 +4282,7 @@
           <a:bodyPr wrap="square" rtlCol="0" anchor="ctr"/>
           <a:lstStyle/>
           <a:p>
-            <a:pPr indent="0" marL="0">
+            <a:pPr marL="0" indent="0">
               <a:buNone/>
             </a:pPr>
             <a:r>
@@ -2958,7 +4321,7 @@
           <a:bodyPr wrap="square" rtlCol="0" anchor="ctr"/>
           <a:lstStyle/>
           <a:p>
-            <a:pPr indent="0" marL="0">
+            <a:pPr marL="0" indent="0">
               <a:buNone/>
             </a:pPr>
             <a:r>
@@ -3000,6 +4363,13 @@
             <a:prstDash val="solid"/>
           </a:ln>
         </p:spPr>
+        <p:txBody>
+          <a:bodyPr/>
+          <a:lstStyle/>
+          <a:p>
+            <a:endParaRPr lang="en-US"/>
+          </a:p>
+        </p:txBody>
       </p:sp>
       <p:sp>
         <p:nvSpPr>
@@ -3022,7 +4392,7 @@
           <a:bodyPr wrap="square" rtlCol="0" anchor="ctr"/>
           <a:lstStyle/>
           <a:p>
-            <a:pPr indent="0" marL="0">
+            <a:pPr marL="0" indent="0">
               <a:buNone/>
             </a:pPr>
             <a:r>
@@ -3061,7 +4431,7 @@
           <a:bodyPr wrap="square" rtlCol="0" anchor="ctr"/>
           <a:lstStyle/>
           <a:p>
-            <a:pPr indent="0" marL="0">
+            <a:pPr marL="0" indent="0">
               <a:buNone/>
             </a:pPr>
             <a:r>
@@ -3100,7 +4470,7 @@
           <a:bodyPr wrap="square" rtlCol="0" anchor="ctr"/>
           <a:lstStyle/>
           <a:p>
-            <a:pPr indent="0" marL="0">
+            <a:pPr marL="0" indent="0">
               <a:buNone/>
             </a:pPr>
             <a:r>
@@ -3142,6 +4512,13 @@
             <a:prstDash val="solid"/>
           </a:ln>
         </p:spPr>
+        <p:txBody>
+          <a:bodyPr/>
+          <a:lstStyle/>
+          <a:p>
+            <a:endParaRPr lang="en-US"/>
+          </a:p>
+        </p:txBody>
       </p:sp>
       <p:sp>
         <p:nvSpPr>
@@ -3164,7 +4541,7 @@
           <a:bodyPr wrap="square" rtlCol="0" anchor="ctr"/>
           <a:lstStyle/>
           <a:p>
-            <a:pPr indent="0" marL="0">
+            <a:pPr marL="0" indent="0">
               <a:buNone/>
             </a:pPr>
             <a:r>
@@ -3203,7 +4580,7 @@
           <a:bodyPr wrap="square" rtlCol="0" anchor="ctr"/>
           <a:lstStyle/>
           <a:p>
-            <a:pPr indent="0" marL="0">
+            <a:pPr marL="0" indent="0">
               <a:buNone/>
             </a:pPr>
             <a:r>
@@ -3245,6 +4622,13 @@
             <a:prstDash val="solid"/>
           </a:ln>
         </p:spPr>
+        <p:txBody>
+          <a:bodyPr/>
+          <a:lstStyle/>
+          <a:p>
+            <a:endParaRPr lang="en-US"/>
+          </a:p>
+        </p:txBody>
       </p:sp>
       <p:sp>
         <p:nvSpPr>
@@ -3267,7 +4651,7 @@
           <a:bodyPr wrap="square" rtlCol="0" anchor="ctr"/>
           <a:lstStyle/>
           <a:p>
-            <a:pPr indent="0" marL="0">
+            <a:pPr marL="0" indent="0">
               <a:buNone/>
             </a:pPr>
             <a:r>
@@ -3306,7 +4690,7 @@
           <a:bodyPr wrap="square" rtlCol="0" anchor="ctr"/>
           <a:lstStyle/>
           <a:p>
-            <a:pPr indent="0" marL="0">
+            <a:pPr marL="0" indent="0">
               <a:buNone/>
             </a:pPr>
             <a:r>
@@ -3348,6 +4732,13 @@
             <a:prstDash val="solid"/>
           </a:ln>
         </p:spPr>
+        <p:txBody>
+          <a:bodyPr/>
+          <a:lstStyle/>
+          <a:p>
+            <a:endParaRPr lang="en-US"/>
+          </a:p>
+        </p:txBody>
       </p:sp>
       <p:sp>
         <p:nvSpPr>
@@ -3370,7 +4761,7 @@
           <a:bodyPr wrap="square" rtlCol="0" anchor="ctr"/>
           <a:lstStyle/>
           <a:p>
-            <a:pPr indent="0" marL="0">
+            <a:pPr marL="0" indent="0">
               <a:buNone/>
             </a:pPr>
             <a:r>
@@ -3409,7 +4800,7 @@
           <a:bodyPr wrap="square" rtlCol="0" anchor="ctr"/>
           <a:lstStyle/>
           <a:p>
-            <a:pPr indent="0" marL="0">
+            <a:pPr marL="0" indent="0">
               <a:buNone/>
             </a:pPr>
             <a:r>
@@ -3451,6 +4842,13 @@
             <a:prstDash val="solid"/>
           </a:ln>
         </p:spPr>
+        <p:txBody>
+          <a:bodyPr/>
+          <a:lstStyle/>
+          <a:p>
+            <a:endParaRPr lang="en-US"/>
+          </a:p>
+        </p:txBody>
       </p:sp>
       <p:sp>
         <p:nvSpPr>
@@ -3473,7 +4871,7 @@
           <a:bodyPr wrap="square" rtlCol="0" anchor="ctr"/>
           <a:lstStyle/>
           <a:p>
-            <a:pPr indent="0" marL="0">
+            <a:pPr marL="0" indent="0">
               <a:buNone/>
             </a:pPr>
             <a:r>
@@ -3512,7 +4910,7 @@
           <a:bodyPr wrap="square" rtlCol="0" anchor="ctr"/>
           <a:lstStyle/>
           <a:p>
-            <a:pPr indent="0" marL="0">
+            <a:pPr marL="0" indent="0">
               <a:buNone/>
             </a:pPr>
             <a:r>
@@ -3554,6 +4952,13 @@
             <a:prstDash val="solid"/>
           </a:ln>
         </p:spPr>
+        <p:txBody>
+          <a:bodyPr/>
+          <a:lstStyle/>
+          <a:p>
+            <a:endParaRPr lang="en-US"/>
+          </a:p>
+        </p:txBody>
       </p:sp>
       <p:sp>
         <p:nvSpPr>
@@ -3576,7 +4981,7 @@
           <a:bodyPr wrap="square" rtlCol="0" anchor="ctr"/>
           <a:lstStyle/>
           <a:p>
-            <a:pPr indent="0" marL="0">
+            <a:pPr marL="0" indent="0">
               <a:buNone/>
             </a:pPr>
             <a:r>
@@ -3615,7 +5020,7 @@
           <a:bodyPr wrap="square" rtlCol="0" anchor="ctr"/>
           <a:lstStyle/>
           <a:p>
-            <a:pPr indent="0" marL="0">
+            <a:pPr marL="0" indent="0">
               <a:buNone/>
             </a:pPr>
             <a:r>
@@ -3657,6 +5062,13 @@
             <a:prstDash val="solid"/>
           </a:ln>
         </p:spPr>
+        <p:txBody>
+          <a:bodyPr/>
+          <a:lstStyle/>
+          <a:p>
+            <a:endParaRPr lang="en-US"/>
+          </a:p>
+        </p:txBody>
       </p:sp>
       <p:sp>
         <p:nvSpPr>
@@ -3679,7 +5091,7 @@
           <a:bodyPr wrap="square" rtlCol="0" anchor="ctr"/>
           <a:lstStyle/>
           <a:p>
-            <a:pPr indent="0" marL="0">
+            <a:pPr marL="0" indent="0">
               <a:buNone/>
             </a:pPr>
             <a:r>
@@ -3718,7 +5130,7 @@
           <a:bodyPr wrap="square" rtlCol="0" anchor="ctr"/>
           <a:lstStyle/>
           <a:p>
-            <a:pPr indent="0" marL="0">
+            <a:pPr marL="0" indent="0">
               <a:buNone/>
             </a:pPr>
             <a:r>
@@ -3760,6 +5172,13 @@
             <a:prstDash val="solid"/>
           </a:ln>
         </p:spPr>
+        <p:txBody>
+          <a:bodyPr/>
+          <a:lstStyle/>
+          <a:p>
+            <a:endParaRPr lang="en-US"/>
+          </a:p>
+        </p:txBody>
       </p:sp>
       <p:sp>
         <p:nvSpPr>
@@ -3782,7 +5201,7 @@
           <a:bodyPr wrap="square" rtlCol="0" anchor="ctr"/>
           <a:lstStyle/>
           <a:p>
-            <a:pPr indent="0" marL="0">
+            <a:pPr marL="0" indent="0">
               <a:buNone/>
             </a:pPr>
             <a:r>
@@ -3821,7 +5240,7 @@
           <a:bodyPr wrap="square" rtlCol="0" anchor="ctr"/>
           <a:lstStyle/>
           <a:p>
-            <a:pPr indent="0" marL="0">
+            <a:pPr marL="0" indent="0">
               <a:buNone/>
             </a:pPr>
             <a:r>
@@ -3863,6 +5282,13 @@
             <a:prstDash val="solid"/>
           </a:ln>
         </p:spPr>
+        <p:txBody>
+          <a:bodyPr/>
+          <a:lstStyle/>
+          <a:p>
+            <a:endParaRPr lang="en-US"/>
+          </a:p>
+        </p:txBody>
       </p:sp>
       <p:sp>
         <p:nvSpPr>
@@ -3885,7 +5311,7 @@
           <a:bodyPr wrap="square" rtlCol="0" anchor="ctr"/>
           <a:lstStyle/>
           <a:p>
-            <a:pPr indent="0" marL="0">
+            <a:pPr marL="0" indent="0">
               <a:buNone/>
             </a:pPr>
             <a:r>
@@ -3924,7 +5350,7 @@
           <a:bodyPr wrap="square" rtlCol="0" anchor="ctr"/>
           <a:lstStyle/>
           <a:p>
-            <a:pPr indent="0" marL="0">
+            <a:pPr marL="0" indent="0">
               <a:buNone/>
             </a:pPr>
             <a:r>
@@ -3966,6 +5392,13 @@
             <a:prstDash val="solid"/>
           </a:ln>
         </p:spPr>
+        <p:txBody>
+          <a:bodyPr/>
+          <a:lstStyle/>
+          <a:p>
+            <a:endParaRPr lang="en-US"/>
+          </a:p>
+        </p:txBody>
       </p:sp>
     </p:spTree>
   </p:cSld>
@@ -3975,7 +5408,7 @@
 </p:sld>
 </file>
 
-<file path=ppt/slides/slide4.xml><?xml version="1.0" encoding="utf-8"?>
+<file path=ppt/slides/slide5.xml><?xml version="1.0" encoding="utf-8"?>
 <p:sld xmlns:a="http://schemas.openxmlformats.org/drawingml/2006/main" xmlns:r="http://schemas.openxmlformats.org/officeDocument/2006/relationships" xmlns:p="http://schemas.openxmlformats.org/presentationml/2006/main">
   <p:cSld name="Slide 4">
     <p:bg>
@@ -3983,6 +5416,7 @@
         <a:solidFill>
           <a:srgbClr val="0D1117"/>
         </a:solidFill>
+        <a:effectLst/>
       </p:bgPr>
     </p:bg>
     <p:spTree>
@@ -4023,6 +5457,13 @@
             <a:prstDash val="solid"/>
           </a:ln>
         </p:spPr>
+        <p:txBody>
+          <a:bodyPr/>
+          <a:lstStyle/>
+          <a:p>
+            <a:endParaRPr lang="en-US"/>
+          </a:p>
+        </p:txBody>
       </p:sp>
       <p:sp>
         <p:nvSpPr>
@@ -4045,7 +5486,7 @@
           <a:bodyPr wrap="square" rtlCol="0" anchor="ctr"/>
           <a:lstStyle/>
           <a:p>
-            <a:pPr indent="0" marL="0">
+            <a:pPr marL="0" indent="0">
               <a:buNone/>
             </a:pPr>
             <a:r>
@@ -4087,6 +5528,13 @@
             <a:prstDash val="solid"/>
           </a:ln>
         </p:spPr>
+        <p:txBody>
+          <a:bodyPr/>
+          <a:lstStyle/>
+          <a:p>
+            <a:endParaRPr lang="en-US"/>
+          </a:p>
+        </p:txBody>
       </p:sp>
       <p:sp>
         <p:nvSpPr>
@@ -4112,13 +5560,20 @@
             <a:prstDash val="solid"/>
           </a:ln>
           <a:effectLst>
-            <a:outerShdw sx="100000" sy="100000" kx="0" ky="0" algn="bl" rotWithShape="0" blurRad="101600" dist="38100" dir="8100000">
+            <a:outerShdw blurRad="101600" dist="38100" dir="8100000" algn="bl" rotWithShape="0">
               <a:srgbClr val="000000">
                 <a:alpha val="30000"/>
               </a:srgbClr>
             </a:outerShdw>
           </a:effectLst>
         </p:spPr>
+        <p:txBody>
+          <a:bodyPr/>
+          <a:lstStyle/>
+          <a:p>
+            <a:endParaRPr lang="en-US"/>
+          </a:p>
+        </p:txBody>
       </p:sp>
       <p:sp>
         <p:nvSpPr>
@@ -4144,6 +5599,13 @@
             <a:prstDash val="solid"/>
           </a:ln>
         </p:spPr>
+        <p:txBody>
+          <a:bodyPr/>
+          <a:lstStyle/>
+          <a:p>
+            <a:endParaRPr lang="en-US"/>
+          </a:p>
+        </p:txBody>
       </p:sp>
       <p:sp>
         <p:nvSpPr>
@@ -4166,7 +5628,7 @@
           <a:bodyPr wrap="square" rtlCol="0" anchor="ctr"/>
           <a:lstStyle/>
           <a:p>
-            <a:pPr indent="0" marL="0">
+            <a:pPr marL="0" indent="0">
               <a:buNone/>
             </a:pPr>
             <a:r>
@@ -4205,7 +5667,7 @@
           <a:bodyPr wrap="square" rtlCol="0" anchor="ctr"/>
           <a:lstStyle/>
           <a:p>
-            <a:pPr indent="0" marL="0">
+            <a:pPr marL="0" indent="0">
               <a:buNone/>
             </a:pPr>
             <a:r>
@@ -4222,7 +5684,7 @@
             <a:endParaRPr lang="en-US" sz="1100" dirty="0"/>
           </a:p>
           <a:p>
-            <a:pPr indent="0" marL="0">
+            <a:pPr marL="0" indent="0">
               <a:buNone/>
             </a:pPr>
             <a:r>
@@ -4239,7 +5701,7 @@
             <a:endParaRPr lang="en-US" sz="1100" dirty="0"/>
           </a:p>
           <a:p>
-            <a:pPr indent="0" marL="0">
+            <a:pPr marL="0" indent="0">
               <a:buNone/>
             </a:pPr>
             <a:r>
@@ -4281,13 +5743,20 @@
             <a:prstDash val="solid"/>
           </a:ln>
           <a:effectLst>
-            <a:outerShdw sx="100000" sy="100000" kx="0" ky="0" algn="bl" rotWithShape="0" blurRad="101600" dist="38100" dir="8100000">
+            <a:outerShdw blurRad="101600" dist="38100" dir="8100000" algn="bl" rotWithShape="0">
               <a:srgbClr val="000000">
                 <a:alpha val="30000"/>
               </a:srgbClr>
             </a:outerShdw>
           </a:effectLst>
         </p:spPr>
+        <p:txBody>
+          <a:bodyPr/>
+          <a:lstStyle/>
+          <a:p>
+            <a:endParaRPr lang="en-US"/>
+          </a:p>
+        </p:txBody>
       </p:sp>
       <p:sp>
         <p:nvSpPr>
@@ -4313,6 +5782,13 @@
             <a:prstDash val="solid"/>
           </a:ln>
         </p:spPr>
+        <p:txBody>
+          <a:bodyPr/>
+          <a:lstStyle/>
+          <a:p>
+            <a:endParaRPr lang="en-US"/>
+          </a:p>
+        </p:txBody>
       </p:sp>
       <p:sp>
         <p:nvSpPr>
@@ -4335,7 +5811,7 @@
           <a:bodyPr wrap="square" rtlCol="0" anchor="ctr"/>
           <a:lstStyle/>
           <a:p>
-            <a:pPr indent="0" marL="0">
+            <a:pPr marL="0" indent="0">
               <a:buNone/>
             </a:pPr>
             <a:r>
@@ -4374,7 +5850,7 @@
           <a:bodyPr wrap="square" rtlCol="0" anchor="ctr"/>
           <a:lstStyle/>
           <a:p>
-            <a:pPr indent="0" marL="0">
+            <a:pPr marL="0" indent="0">
               <a:buNone/>
             </a:pPr>
             <a:r>
@@ -4391,7 +5867,7 @@
             <a:endParaRPr lang="en-US" sz="1100" dirty="0"/>
           </a:p>
           <a:p>
-            <a:pPr indent="0" marL="0">
+            <a:pPr marL="0" indent="0">
               <a:buNone/>
             </a:pPr>
             <a:r>
@@ -4408,7 +5884,7 @@
             <a:endParaRPr lang="en-US" sz="1100" dirty="0"/>
           </a:p>
           <a:p>
-            <a:pPr indent="0" marL="0">
+            <a:pPr marL="0" indent="0">
               <a:buNone/>
             </a:pPr>
             <a:r>
@@ -4450,13 +5926,20 @@
             <a:prstDash val="solid"/>
           </a:ln>
           <a:effectLst>
-            <a:outerShdw sx="100000" sy="100000" kx="0" ky="0" algn="bl" rotWithShape="0" blurRad="101600" dist="38100" dir="8100000">
+            <a:outerShdw blurRad="101600" dist="38100" dir="8100000" algn="bl" rotWithShape="0">
               <a:srgbClr val="000000">
                 <a:alpha val="30000"/>
               </a:srgbClr>
             </a:outerShdw>
           </a:effectLst>
         </p:spPr>
+        <p:txBody>
+          <a:bodyPr/>
+          <a:lstStyle/>
+          <a:p>
+            <a:endParaRPr lang="en-US"/>
+          </a:p>
+        </p:txBody>
       </p:sp>
       <p:sp>
         <p:nvSpPr>
@@ -4482,6 +5965,13 @@
             <a:prstDash val="solid"/>
           </a:ln>
         </p:spPr>
+        <p:txBody>
+          <a:bodyPr/>
+          <a:lstStyle/>
+          <a:p>
+            <a:endParaRPr lang="en-US"/>
+          </a:p>
+        </p:txBody>
       </p:sp>
       <p:sp>
         <p:nvSpPr>
@@ -4504,7 +5994,7 @@
           <a:bodyPr wrap="square" rtlCol="0" anchor="ctr"/>
           <a:lstStyle/>
           <a:p>
-            <a:pPr indent="0" marL="0">
+            <a:pPr marL="0" indent="0">
               <a:buNone/>
             </a:pPr>
             <a:r>
@@ -4543,7 +6033,7 @@
           <a:bodyPr wrap="square" rtlCol="0" anchor="ctr"/>
           <a:lstStyle/>
           <a:p>
-            <a:pPr indent="0" marL="0">
+            <a:pPr marL="0" indent="0">
               <a:buNone/>
             </a:pPr>
             <a:r>
@@ -4560,7 +6050,7 @@
             <a:endParaRPr lang="en-US" sz="1100" dirty="0"/>
           </a:p>
           <a:p>
-            <a:pPr indent="0" marL="0">
+            <a:pPr marL="0" indent="0">
               <a:buNone/>
             </a:pPr>
             <a:r>
@@ -4577,7 +6067,7 @@
             <a:endParaRPr lang="en-US" sz="1100" dirty="0"/>
           </a:p>
           <a:p>
-            <a:pPr indent="0" marL="0">
+            <a:pPr marL="0" indent="0">
               <a:buNone/>
             </a:pPr>
             <a:r>
@@ -4619,13 +6109,20 @@
             <a:prstDash val="solid"/>
           </a:ln>
           <a:effectLst>
-            <a:outerShdw sx="100000" sy="100000" kx="0" ky="0" algn="bl" rotWithShape="0" blurRad="101600" dist="38100" dir="8100000">
+            <a:outerShdw blurRad="101600" dist="38100" dir="8100000" algn="bl" rotWithShape="0">
               <a:srgbClr val="000000">
                 <a:alpha val="30000"/>
               </a:srgbClr>
             </a:outerShdw>
           </a:effectLst>
         </p:spPr>
+        <p:txBody>
+          <a:bodyPr/>
+          <a:lstStyle/>
+          <a:p>
+            <a:endParaRPr lang="en-US"/>
+          </a:p>
+        </p:txBody>
       </p:sp>
       <p:sp>
         <p:nvSpPr>
@@ -4651,6 +6148,13 @@
             <a:prstDash val="solid"/>
           </a:ln>
         </p:spPr>
+        <p:txBody>
+          <a:bodyPr/>
+          <a:lstStyle/>
+          <a:p>
+            <a:endParaRPr lang="en-US"/>
+          </a:p>
+        </p:txBody>
       </p:sp>
       <p:sp>
         <p:nvSpPr>
@@ -4673,7 +6177,7 @@
           <a:bodyPr wrap="square" rtlCol="0" anchor="ctr"/>
           <a:lstStyle/>
           <a:p>
-            <a:pPr indent="0" marL="0">
+            <a:pPr marL="0" indent="0">
               <a:buNone/>
             </a:pPr>
             <a:r>
@@ -4712,7 +6216,7 @@
           <a:bodyPr wrap="square" rtlCol="0" anchor="ctr"/>
           <a:lstStyle/>
           <a:p>
-            <a:pPr indent="0" marL="0">
+            <a:pPr marL="0" indent="0">
               <a:buNone/>
             </a:pPr>
             <a:r>
@@ -4729,7 +6233,7 @@
             <a:endParaRPr lang="en-US" sz="1100" dirty="0"/>
           </a:p>
           <a:p>
-            <a:pPr indent="0" marL="0">
+            <a:pPr marL="0" indent="0">
               <a:buNone/>
             </a:pPr>
             <a:r>
@@ -4746,7 +6250,7 @@
             <a:endParaRPr lang="en-US" sz="1100" dirty="0"/>
           </a:p>
           <a:p>
-            <a:pPr indent="0" marL="0">
+            <a:pPr marL="0" indent="0">
               <a:buNone/>
             </a:pPr>
             <a:r>
@@ -4788,13 +6292,20 @@
             <a:prstDash val="solid"/>
           </a:ln>
           <a:effectLst>
-            <a:outerShdw sx="100000" sy="100000" kx="0" ky="0" algn="bl" rotWithShape="0" blurRad="101600" dist="38100" dir="8100000">
+            <a:outerShdw blurRad="101600" dist="38100" dir="8100000" algn="bl" rotWithShape="0">
               <a:srgbClr val="000000">
                 <a:alpha val="30000"/>
               </a:srgbClr>
             </a:outerShdw>
           </a:effectLst>
         </p:spPr>
+        <p:txBody>
+          <a:bodyPr/>
+          <a:lstStyle/>
+          <a:p>
+            <a:endParaRPr lang="en-US"/>
+          </a:p>
+        </p:txBody>
       </p:sp>
       <p:sp>
         <p:nvSpPr>
@@ -4820,6 +6331,13 @@
             <a:prstDash val="solid"/>
           </a:ln>
         </p:spPr>
+        <p:txBody>
+          <a:bodyPr/>
+          <a:lstStyle/>
+          <a:p>
+            <a:endParaRPr lang="en-US"/>
+          </a:p>
+        </p:txBody>
       </p:sp>
       <p:sp>
         <p:nvSpPr>
@@ -4842,7 +6360,7 @@
           <a:bodyPr wrap="square" rtlCol="0" anchor="ctr"/>
           <a:lstStyle/>
           <a:p>
-            <a:pPr indent="0" marL="0">
+            <a:pPr marL="0" indent="0">
               <a:buNone/>
             </a:pPr>
             <a:r>
@@ -4881,7 +6399,7 @@
           <a:bodyPr wrap="square" rtlCol="0" anchor="ctr"/>
           <a:lstStyle/>
           <a:p>
-            <a:pPr indent="0" marL="0">
+            <a:pPr marL="0" indent="0">
               <a:buNone/>
             </a:pPr>
             <a:r>
@@ -4898,7 +6416,7 @@
             <a:endParaRPr lang="en-US" sz="1100" dirty="0"/>
           </a:p>
           <a:p>
-            <a:pPr indent="0" marL="0">
+            <a:pPr marL="0" indent="0">
               <a:buNone/>
             </a:pPr>
             <a:r>
@@ -4915,7 +6433,7 @@
             <a:endParaRPr lang="en-US" sz="1100" dirty="0"/>
           </a:p>
           <a:p>
-            <a:pPr indent="0" marL="0">
+            <a:pPr marL="0" indent="0">
               <a:buNone/>
             </a:pPr>
             <a:r>
@@ -4957,13 +6475,20 @@
             <a:prstDash val="solid"/>
           </a:ln>
           <a:effectLst>
-            <a:outerShdw sx="100000" sy="100000" kx="0" ky="0" algn="bl" rotWithShape="0" blurRad="101600" dist="38100" dir="8100000">
+            <a:outerShdw blurRad="101600" dist="38100" dir="8100000" algn="bl" rotWithShape="0">
               <a:srgbClr val="000000">
                 <a:alpha val="30000"/>
               </a:srgbClr>
             </a:outerShdw>
           </a:effectLst>
         </p:spPr>
+        <p:txBody>
+          <a:bodyPr/>
+          <a:lstStyle/>
+          <a:p>
+            <a:endParaRPr lang="en-US"/>
+          </a:p>
+        </p:txBody>
       </p:sp>
       <p:sp>
         <p:nvSpPr>
@@ -4989,6 +6514,13 @@
             <a:prstDash val="solid"/>
           </a:ln>
         </p:spPr>
+        <p:txBody>
+          <a:bodyPr/>
+          <a:lstStyle/>
+          <a:p>
+            <a:endParaRPr lang="en-US"/>
+          </a:p>
+        </p:txBody>
       </p:sp>
       <p:sp>
         <p:nvSpPr>
@@ -5011,7 +6543,7 @@
           <a:bodyPr wrap="square" rtlCol="0" anchor="ctr"/>
           <a:lstStyle/>
           <a:p>
-            <a:pPr indent="0" marL="0">
+            <a:pPr marL="0" indent="0">
               <a:buNone/>
             </a:pPr>
             <a:r>
@@ -5050,7 +6582,7 @@
           <a:bodyPr wrap="square" rtlCol="0" anchor="ctr"/>
           <a:lstStyle/>
           <a:p>
-            <a:pPr indent="0" marL="0">
+            <a:pPr marL="0" indent="0">
               <a:buNone/>
             </a:pPr>
             <a:r>
@@ -5067,7 +6599,7 @@
             <a:endParaRPr lang="en-US" sz="1100" dirty="0"/>
           </a:p>
           <a:p>
-            <a:pPr indent="0" marL="0">
+            <a:pPr marL="0" indent="0">
               <a:buNone/>
             </a:pPr>
             <a:r>
@@ -5084,7 +6616,7 @@
             <a:endParaRPr lang="en-US" sz="1100" dirty="0"/>
           </a:p>
           <a:p>
-            <a:pPr indent="0" marL="0">
+            <a:pPr marL="0" indent="0">
               <a:buNone/>
             </a:pPr>
             <a:r>
@@ -5126,6 +6658,13 @@
             <a:prstDash val="solid"/>
           </a:ln>
         </p:spPr>
+        <p:txBody>
+          <a:bodyPr/>
+          <a:lstStyle/>
+          <a:p>
+            <a:endParaRPr lang="en-US"/>
+          </a:p>
+        </p:txBody>
       </p:sp>
     </p:spTree>
   </p:cSld>
@@ -5135,7 +6674,7 @@
 </p:sld>
 </file>
 
-<file path=ppt/slides/slide5.xml><?xml version="1.0" encoding="utf-8"?>
+<file path=ppt/slides/slide6.xml><?xml version="1.0" encoding="utf-8"?>
 <p:sld xmlns:a="http://schemas.openxmlformats.org/drawingml/2006/main" xmlns:r="http://schemas.openxmlformats.org/officeDocument/2006/relationships" xmlns:p="http://schemas.openxmlformats.org/presentationml/2006/main">
   <p:cSld name="Slide 5">
     <p:bg>
@@ -5143,6 +6682,7 @@
         <a:solidFill>
           <a:srgbClr val="0D1117"/>
         </a:solidFill>
+        <a:effectLst/>
       </p:bgPr>
     </p:bg>
     <p:spTree>
@@ -5183,6 +6723,13 @@
             <a:prstDash val="solid"/>
           </a:ln>
         </p:spPr>
+        <p:txBody>
+          <a:bodyPr/>
+          <a:lstStyle/>
+          <a:p>
+            <a:endParaRPr lang="en-US"/>
+          </a:p>
+        </p:txBody>
       </p:sp>
       <p:sp>
         <p:nvSpPr>
@@ -5205,7 +6752,7 @@
           <a:bodyPr wrap="square" rtlCol="0" anchor="ctr"/>
           <a:lstStyle/>
           <a:p>
-            <a:pPr indent="0" marL="0">
+            <a:pPr marL="0" indent="0">
               <a:buNone/>
             </a:pPr>
             <a:r>
@@ -5247,6 +6794,13 @@
             <a:prstDash val="solid"/>
           </a:ln>
         </p:spPr>
+        <p:txBody>
+          <a:bodyPr/>
+          <a:lstStyle/>
+          <a:p>
+            <a:endParaRPr lang="en-US"/>
+          </a:p>
+        </p:txBody>
       </p:sp>
       <p:sp>
         <p:nvSpPr>
@@ -5269,7 +6823,7 @@
           <a:bodyPr wrap="square" rtlCol="0" anchor="ctr"/>
           <a:lstStyle/>
           <a:p>
-            <a:pPr indent="0" marL="0">
+            <a:pPr marL="0" indent="0">
               <a:buNone/>
             </a:pPr>
             <a:r>
@@ -5308,7 +6862,7 @@
           <a:bodyPr wrap="square" rtlCol="0" anchor="ctr"/>
           <a:lstStyle/>
           <a:p>
-            <a:pPr indent="0" marL="0">
+            <a:pPr marL="0" indent="0">
               <a:buNone/>
             </a:pPr>
             <a:r>
@@ -5347,7 +6901,7 @@
           <a:bodyPr wrap="square" rtlCol="0" anchor="ctr"/>
           <a:lstStyle/>
           <a:p>
-            <a:pPr indent="0" marL="0">
+            <a:pPr marL="0" indent="0">
               <a:buNone/>
             </a:pPr>
             <a:r>
@@ -5386,7 +6940,7 @@
           <a:bodyPr wrap="square" rtlCol="0" anchor="ctr"/>
           <a:lstStyle/>
           <a:p>
-            <a:pPr indent="0" marL="0">
+            <a:pPr marL="0" indent="0">
               <a:buNone/>
             </a:pPr>
             <a:r>
@@ -5425,7 +6979,7 @@
           <a:bodyPr wrap="square" rtlCol="0" anchor="ctr"/>
           <a:lstStyle/>
           <a:p>
-            <a:pPr indent="0" marL="0">
+            <a:pPr marL="0" indent="0">
               <a:buNone/>
             </a:pPr>
             <a:r>
@@ -5464,7 +7018,7 @@
           <a:bodyPr wrap="square" rtlCol="0" anchor="ctr"/>
           <a:lstStyle/>
           <a:p>
-            <a:pPr indent="0" marL="0">
+            <a:pPr marL="0" indent="0">
               <a:buNone/>
             </a:pPr>
             <a:r>
@@ -5503,7 +7057,7 @@
           <a:bodyPr wrap="square" rtlCol="0" anchor="ctr"/>
           <a:lstStyle/>
           <a:p>
-            <a:pPr indent="0" marL="0">
+            <a:pPr marL="0" indent="0">
               <a:buNone/>
             </a:pPr>
             <a:r>
@@ -5542,7 +7096,7 @@
           <a:bodyPr wrap="square" rtlCol="0" anchor="ctr"/>
           <a:lstStyle/>
           <a:p>
-            <a:pPr indent="0" marL="0">
+            <a:pPr marL="0" indent="0">
               <a:buNone/>
             </a:pPr>
             <a:r>
@@ -5584,6 +7138,13 @@
             <a:prstDash val="solid"/>
           </a:ln>
         </p:spPr>
+        <p:txBody>
+          <a:bodyPr/>
+          <a:lstStyle/>
+          <a:p>
+            <a:endParaRPr lang="en-US"/>
+          </a:p>
+        </p:txBody>
       </p:sp>
       <p:sp>
         <p:nvSpPr>
@@ -5606,7 +7167,7 @@
           <a:bodyPr wrap="square" rtlCol="0" anchor="ctr"/>
           <a:lstStyle/>
           <a:p>
-            <a:pPr indent="0" marL="0">
+            <a:pPr marL="0" indent="0">
               <a:buNone/>
             </a:pPr>
             <a:r>
@@ -5645,7 +7206,7 @@
           <a:bodyPr wrap="square" rtlCol="0" anchor="ctr"/>
           <a:lstStyle/>
           <a:p>
-            <a:pPr indent="0" marL="0">
+            <a:pPr marL="0" indent="0">
               <a:buNone/>
             </a:pPr>
             <a:r>
@@ -5684,7 +7245,7 @@
           <a:bodyPr wrap="square" rtlCol="0" anchor="ctr"/>
           <a:lstStyle/>
           <a:p>
-            <a:pPr indent="0" marL="0">
+            <a:pPr marL="0" indent="0">
               <a:buNone/>
             </a:pPr>
             <a:r>
@@ -5723,7 +7284,7 @@
           <a:bodyPr wrap="square" rtlCol="0" anchor="ctr"/>
           <a:lstStyle/>
           <a:p>
-            <a:pPr indent="0" marL="0">
+            <a:pPr marL="0" indent="0">
               <a:buNone/>
             </a:pPr>
             <a:r>
@@ -5762,7 +7323,7 @@
           <a:bodyPr wrap="square" rtlCol="0" anchor="ctr"/>
           <a:lstStyle/>
           <a:p>
-            <a:pPr indent="0" marL="0">
+            <a:pPr marL="0" indent="0">
               <a:buNone/>
             </a:pPr>
             <a:r>
@@ -5801,7 +7362,7 @@
           <a:bodyPr wrap="square" rtlCol="0" anchor="ctr"/>
           <a:lstStyle/>
           <a:p>
-            <a:pPr indent="0" marL="0">
+            <a:pPr marL="0" indent="0">
               <a:buNone/>
             </a:pPr>
             <a:endParaRPr lang="en-US" sz="1100" dirty="0"/>
@@ -5829,7 +7390,7 @@
           <a:bodyPr wrap="square" rtlCol="0" anchor="ctr"/>
           <a:lstStyle/>
           <a:p>
-            <a:pPr indent="0" marL="0">
+            <a:pPr marL="0" indent="0">
               <a:buNone/>
             </a:pPr>
             <a:r>
@@ -5868,7 +7429,7 @@
           <a:bodyPr wrap="square" rtlCol="0" anchor="ctr"/>
           <a:lstStyle/>
           <a:p>
-            <a:pPr indent="0" marL="0">
+            <a:pPr marL="0" indent="0">
               <a:buNone/>
             </a:pPr>
             <a:r>
@@ -5910,6 +7471,13 @@
             <a:prstDash val="solid"/>
           </a:ln>
         </p:spPr>
+        <p:txBody>
+          <a:bodyPr/>
+          <a:lstStyle/>
+          <a:p>
+            <a:endParaRPr lang="en-US"/>
+          </a:p>
+        </p:txBody>
       </p:sp>
     </p:spTree>
   </p:cSld>
@@ -5919,7 +7487,7 @@
 </p:sld>
 </file>
 
-<file path=ppt/slides/slide6.xml><?xml version="1.0" encoding="utf-8"?>
+<file path=ppt/slides/slide7.xml><?xml version="1.0" encoding="utf-8"?>
 <p:sld xmlns:a="http://schemas.openxmlformats.org/drawingml/2006/main" xmlns:r="http://schemas.openxmlformats.org/officeDocument/2006/relationships" xmlns:p="http://schemas.openxmlformats.org/presentationml/2006/main">
   <p:cSld name="Slide 6">
     <p:bg>
@@ -5927,6 +7495,7 @@
         <a:solidFill>
           <a:srgbClr val="0D1117"/>
         </a:solidFill>
+        <a:effectLst/>
       </p:bgPr>
     </p:bg>
     <p:spTree>
@@ -5967,6 +7536,13 @@
             <a:prstDash val="solid"/>
           </a:ln>
         </p:spPr>
+        <p:txBody>
+          <a:bodyPr/>
+          <a:lstStyle/>
+          <a:p>
+            <a:endParaRPr lang="en-US"/>
+          </a:p>
+        </p:txBody>
       </p:sp>
       <p:sp>
         <p:nvSpPr>
@@ -5989,7 +7565,7 @@
           <a:bodyPr wrap="square" rtlCol="0" anchor="ctr"/>
           <a:lstStyle/>
           <a:p>
-            <a:pPr indent="0" marL="0">
+            <a:pPr marL="0" indent="0">
               <a:buNone/>
             </a:pPr>
             <a:r>
@@ -6031,6 +7607,13 @@
             <a:prstDash val="solid"/>
           </a:ln>
         </p:spPr>
+        <p:txBody>
+          <a:bodyPr/>
+          <a:lstStyle/>
+          <a:p>
+            <a:endParaRPr lang="en-US"/>
+          </a:p>
+        </p:txBody>
       </p:sp>
       <p:sp>
         <p:nvSpPr>
@@ -6053,7 +7636,7 @@
           <a:bodyPr wrap="square" rtlCol="0" anchor="ctr"/>
           <a:lstStyle/>
           <a:p>
-            <a:pPr indent="0" marL="0">
+            <a:pPr marL="0" indent="0">
               <a:buNone/>
             </a:pPr>
             <a:r>
@@ -6095,6 +7678,13 @@
             <a:prstDash val="solid"/>
           </a:ln>
         </p:spPr>
+        <p:txBody>
+          <a:bodyPr/>
+          <a:lstStyle/>
+          <a:p>
+            <a:endParaRPr lang="en-US"/>
+          </a:p>
+        </p:txBody>
       </p:sp>
       <p:sp>
         <p:nvSpPr>
@@ -6117,7 +7707,7 @@
           <a:bodyPr wrap="square" rtlCol="0" anchor="ctr"/>
           <a:lstStyle/>
           <a:p>
-            <a:pPr indent="0" marL="0">
+            <a:pPr marL="0" indent="0">
               <a:buNone/>
             </a:pPr>
             <a:r>
@@ -6159,6 +7749,13 @@
             <a:prstDash val="solid"/>
           </a:ln>
         </p:spPr>
+        <p:txBody>
+          <a:bodyPr/>
+          <a:lstStyle/>
+          <a:p>
+            <a:endParaRPr lang="en-US"/>
+          </a:p>
+        </p:txBody>
       </p:sp>
       <p:sp>
         <p:nvSpPr>
@@ -6181,7 +7778,7 @@
           <a:bodyPr wrap="square" rtlCol="0" anchor="ctr"/>
           <a:lstStyle/>
           <a:p>
-            <a:pPr indent="0" marL="0">
+            <a:pPr marL="0" indent="0">
               <a:buNone/>
             </a:pPr>
             <a:r>
@@ -6223,6 +7820,13 @@
             <a:prstDash val="solid"/>
           </a:ln>
         </p:spPr>
+        <p:txBody>
+          <a:bodyPr/>
+          <a:lstStyle/>
+          <a:p>
+            <a:endParaRPr lang="en-US"/>
+          </a:p>
+        </p:txBody>
       </p:sp>
       <p:sp>
         <p:nvSpPr>
@@ -6245,7 +7849,7 @@
           <a:bodyPr wrap="square" rtlCol="0" anchor="ctr"/>
           <a:lstStyle/>
           <a:p>
-            <a:pPr indent="0" marL="0">
+            <a:pPr marL="0" indent="0">
               <a:buNone/>
             </a:pPr>
             <a:r>
@@ -6287,6 +7891,13 @@
             <a:prstDash val="solid"/>
           </a:ln>
         </p:spPr>
+        <p:txBody>
+          <a:bodyPr/>
+          <a:lstStyle/>
+          <a:p>
+            <a:endParaRPr lang="en-US"/>
+          </a:p>
+        </p:txBody>
       </p:sp>
       <p:sp>
         <p:nvSpPr>
@@ -6309,7 +7920,7 @@
           <a:bodyPr wrap="square" rtlCol="0" anchor="ctr"/>
           <a:lstStyle/>
           <a:p>
-            <a:pPr indent="0" marL="0">
+            <a:pPr marL="0" indent="0">
               <a:buNone/>
             </a:pPr>
             <a:r>
@@ -6351,6 +7962,13 @@
             <a:prstDash val="solid"/>
           </a:ln>
         </p:spPr>
+        <p:txBody>
+          <a:bodyPr/>
+          <a:lstStyle/>
+          <a:p>
+            <a:endParaRPr lang="en-US"/>
+          </a:p>
+        </p:txBody>
       </p:sp>
       <p:sp>
         <p:nvSpPr>
@@ -6373,7 +7991,7 @@
           <a:bodyPr wrap="square" rtlCol="0" anchor="ctr"/>
           <a:lstStyle/>
           <a:p>
-            <a:pPr indent="0" marL="0">
+            <a:pPr marL="0" indent="0">
               <a:buNone/>
             </a:pPr>
             <a:r>
@@ -6415,6 +8033,13 @@
             <a:prstDash val="solid"/>
           </a:ln>
         </p:spPr>
+        <p:txBody>
+          <a:bodyPr/>
+          <a:lstStyle/>
+          <a:p>
+            <a:endParaRPr lang="en-US"/>
+          </a:p>
+        </p:txBody>
       </p:sp>
       <p:sp>
         <p:nvSpPr>
@@ -6437,7 +8062,7 @@
           <a:bodyPr wrap="square" rtlCol="0" anchor="ctr"/>
           <a:lstStyle/>
           <a:p>
-            <a:pPr indent="0" marL="0">
+            <a:pPr marL="0" indent="0">
               <a:buNone/>
             </a:pPr>
             <a:r>
@@ -6479,6 +8104,13 @@
             <a:prstDash val="solid"/>
           </a:ln>
         </p:spPr>
+        <p:txBody>
+          <a:bodyPr/>
+          <a:lstStyle/>
+          <a:p>
+            <a:endParaRPr lang="en-US"/>
+          </a:p>
+        </p:txBody>
       </p:sp>
       <p:sp>
         <p:nvSpPr>
@@ -6501,7 +8133,7 @@
           <a:bodyPr wrap="square" rtlCol="0" anchor="ctr"/>
           <a:lstStyle/>
           <a:p>
-            <a:pPr indent="0" marL="0">
+            <a:pPr marL="0" indent="0">
               <a:buNone/>
             </a:pPr>
             <a:r>
@@ -6543,6 +8175,13 @@
             <a:prstDash val="solid"/>
           </a:ln>
         </p:spPr>
+        <p:txBody>
+          <a:bodyPr/>
+          <a:lstStyle/>
+          <a:p>
+            <a:endParaRPr lang="en-US"/>
+          </a:p>
+        </p:txBody>
       </p:sp>
       <p:sp>
         <p:nvSpPr>
@@ -6565,7 +8204,7 @@
           <a:bodyPr wrap="square" rtlCol="0" anchor="ctr"/>
           <a:lstStyle/>
           <a:p>
-            <a:pPr indent="0" marL="0">
+            <a:pPr marL="0" indent="0">
               <a:buNone/>
             </a:pPr>
             <a:r>
@@ -6607,6 +8246,13 @@
             <a:prstDash val="solid"/>
           </a:ln>
         </p:spPr>
+        <p:txBody>
+          <a:bodyPr/>
+          <a:lstStyle/>
+          <a:p>
+            <a:endParaRPr lang="en-US"/>
+          </a:p>
+        </p:txBody>
       </p:sp>
       <p:sp>
         <p:nvSpPr>
@@ -6629,7 +8275,7 @@
           <a:bodyPr wrap="square" rtlCol="0" anchor="ctr"/>
           <a:lstStyle/>
           <a:p>
-            <a:pPr indent="0" marL="0">
+            <a:pPr marL="0" indent="0">
               <a:buNone/>
             </a:pPr>
             <a:r>
@@ -6671,6 +8317,13 @@
             <a:prstDash val="solid"/>
           </a:ln>
         </p:spPr>
+        <p:txBody>
+          <a:bodyPr/>
+          <a:lstStyle/>
+          <a:p>
+            <a:endParaRPr lang="en-US"/>
+          </a:p>
+        </p:txBody>
       </p:sp>
       <p:sp>
         <p:nvSpPr>
@@ -6693,7 +8346,7 @@
           <a:bodyPr wrap="square" rtlCol="0" anchor="ctr"/>
           <a:lstStyle/>
           <a:p>
-            <a:pPr indent="0" marL="0">
+            <a:pPr marL="0" indent="0">
               <a:buNone/>
             </a:pPr>
             <a:r>
@@ -6735,6 +8388,13 @@
             <a:prstDash val="solid"/>
           </a:ln>
         </p:spPr>
+        <p:txBody>
+          <a:bodyPr/>
+          <a:lstStyle/>
+          <a:p>
+            <a:endParaRPr lang="en-US"/>
+          </a:p>
+        </p:txBody>
       </p:sp>
       <p:sp>
         <p:nvSpPr>
@@ -6757,7 +8417,7 @@
           <a:bodyPr wrap="square" rtlCol="0" anchor="ctr"/>
           <a:lstStyle/>
           <a:p>
-            <a:pPr indent="0" marL="0">
+            <a:pPr marL="0" indent="0">
               <a:buNone/>
             </a:pPr>
             <a:r>
@@ -6799,6 +8459,13 @@
             <a:prstDash val="solid"/>
           </a:ln>
         </p:spPr>
+        <p:txBody>
+          <a:bodyPr/>
+          <a:lstStyle/>
+          <a:p>
+            <a:endParaRPr lang="en-US"/>
+          </a:p>
+        </p:txBody>
       </p:sp>
       <p:sp>
         <p:nvSpPr>
@@ -6821,7 +8488,7 @@
           <a:bodyPr wrap="square" rtlCol="0" anchor="ctr"/>
           <a:lstStyle/>
           <a:p>
-            <a:pPr indent="0" marL="0">
+            <a:pPr marL="0" indent="0">
               <a:buNone/>
             </a:pPr>
             <a:r>
@@ -6863,6 +8530,13 @@
             <a:prstDash val="solid"/>
           </a:ln>
         </p:spPr>
+        <p:txBody>
+          <a:bodyPr/>
+          <a:lstStyle/>
+          <a:p>
+            <a:endParaRPr lang="en-US"/>
+          </a:p>
+        </p:txBody>
       </p:sp>
       <p:sp>
         <p:nvSpPr>
@@ -6885,7 +8559,7 @@
           <a:bodyPr wrap="square" rtlCol="0" anchor="ctr"/>
           <a:lstStyle/>
           <a:p>
-            <a:pPr indent="0" marL="0">
+            <a:pPr marL="0" indent="0">
               <a:buNone/>
             </a:pPr>
             <a:r>
@@ -6927,6 +8601,13 @@
             <a:prstDash val="solid"/>
           </a:ln>
         </p:spPr>
+        <p:txBody>
+          <a:bodyPr/>
+          <a:lstStyle/>
+          <a:p>
+            <a:endParaRPr lang="en-US"/>
+          </a:p>
+        </p:txBody>
       </p:sp>
       <p:sp>
         <p:nvSpPr>
@@ -6949,7 +8630,7 @@
           <a:bodyPr wrap="square" rtlCol="0" anchor="ctr"/>
           <a:lstStyle/>
           <a:p>
-            <a:pPr indent="0" marL="0">
+            <a:pPr marL="0" indent="0">
               <a:buNone/>
             </a:pPr>
             <a:r>
@@ -6991,6 +8672,13 @@
             <a:prstDash val="solid"/>
           </a:ln>
         </p:spPr>
+        <p:txBody>
+          <a:bodyPr/>
+          <a:lstStyle/>
+          <a:p>
+            <a:endParaRPr lang="en-US"/>
+          </a:p>
+        </p:txBody>
       </p:sp>
       <p:sp>
         <p:nvSpPr>
@@ -7013,7 +8701,7 @@
           <a:bodyPr wrap="square" rtlCol="0" anchor="ctr"/>
           <a:lstStyle/>
           <a:p>
-            <a:pPr indent="0" marL="0">
+            <a:pPr marL="0" indent="0">
               <a:buNone/>
             </a:pPr>
             <a:r>
@@ -7055,6 +8743,13 @@
             <a:prstDash val="solid"/>
           </a:ln>
         </p:spPr>
+        <p:txBody>
+          <a:bodyPr/>
+          <a:lstStyle/>
+          <a:p>
+            <a:endParaRPr lang="en-US"/>
+          </a:p>
+        </p:txBody>
       </p:sp>
       <p:sp>
         <p:nvSpPr>
@@ -7077,7 +8772,7 @@
           <a:bodyPr wrap="square" rtlCol="0" anchor="ctr"/>
           <a:lstStyle/>
           <a:p>
-            <a:pPr indent="0" marL="0">
+            <a:pPr marL="0" indent="0">
               <a:buNone/>
             </a:pPr>
             <a:r>
@@ -7119,6 +8814,13 @@
             <a:prstDash val="solid"/>
           </a:ln>
         </p:spPr>
+        <p:txBody>
+          <a:bodyPr/>
+          <a:lstStyle/>
+          <a:p>
+            <a:endParaRPr lang="en-US"/>
+          </a:p>
+        </p:txBody>
       </p:sp>
       <p:sp>
         <p:nvSpPr>
@@ -7141,7 +8843,7 @@
           <a:bodyPr wrap="square" rtlCol="0" anchor="ctr"/>
           <a:lstStyle/>
           <a:p>
-            <a:pPr indent="0" marL="0">
+            <a:pPr marL="0" indent="0">
               <a:buNone/>
             </a:pPr>
             <a:r>
@@ -7183,6 +8885,13 @@
             <a:prstDash val="solid"/>
           </a:ln>
         </p:spPr>
+        <p:txBody>
+          <a:bodyPr/>
+          <a:lstStyle/>
+          <a:p>
+            <a:endParaRPr lang="en-US"/>
+          </a:p>
+        </p:txBody>
       </p:sp>
       <p:sp>
         <p:nvSpPr>
@@ -7205,7 +8914,7 @@
           <a:bodyPr wrap="square" rtlCol="0" anchor="ctr"/>
           <a:lstStyle/>
           <a:p>
-            <a:pPr indent="0" marL="0">
+            <a:pPr marL="0" indent="0">
               <a:buNone/>
             </a:pPr>
             <a:r>
@@ -7247,6 +8956,13 @@
             <a:prstDash val="solid"/>
           </a:ln>
         </p:spPr>
+        <p:txBody>
+          <a:bodyPr/>
+          <a:lstStyle/>
+          <a:p>
+            <a:endParaRPr lang="en-US"/>
+          </a:p>
+        </p:txBody>
       </p:sp>
       <p:sp>
         <p:nvSpPr>
@@ -7269,7 +8985,7 @@
           <a:bodyPr wrap="square" rtlCol="0" anchor="ctr"/>
           <a:lstStyle/>
           <a:p>
-            <a:pPr indent="0" marL="0">
+            <a:pPr marL="0" indent="0">
               <a:buNone/>
             </a:pPr>
             <a:r>
@@ -7311,6 +9027,13 @@
             <a:prstDash val="solid"/>
           </a:ln>
         </p:spPr>
+        <p:txBody>
+          <a:bodyPr/>
+          <a:lstStyle/>
+          <a:p>
+            <a:endParaRPr lang="en-US"/>
+          </a:p>
+        </p:txBody>
       </p:sp>
       <p:sp>
         <p:nvSpPr>
@@ -7333,7 +9056,7 @@
           <a:bodyPr wrap="square" rtlCol="0" anchor="ctr"/>
           <a:lstStyle/>
           <a:p>
-            <a:pPr indent="0" marL="0">
+            <a:pPr marL="0" indent="0">
               <a:buNone/>
             </a:pPr>
             <a:r>
@@ -7375,6 +9098,13 @@
             <a:prstDash val="solid"/>
           </a:ln>
         </p:spPr>
+        <p:txBody>
+          <a:bodyPr/>
+          <a:lstStyle/>
+          <a:p>
+            <a:endParaRPr lang="en-US"/>
+          </a:p>
+        </p:txBody>
       </p:sp>
       <p:sp>
         <p:nvSpPr>
@@ -7397,7 +9127,7 @@
           <a:bodyPr wrap="square" rtlCol="0" anchor="ctr"/>
           <a:lstStyle/>
           <a:p>
-            <a:pPr indent="0" marL="0">
+            <a:pPr marL="0" indent="0">
               <a:buNone/>
             </a:pPr>
             <a:r>
@@ -7439,6 +9169,13 @@
             <a:prstDash val="solid"/>
           </a:ln>
         </p:spPr>
+        <p:txBody>
+          <a:bodyPr/>
+          <a:lstStyle/>
+          <a:p>
+            <a:endParaRPr lang="en-US"/>
+          </a:p>
+        </p:txBody>
       </p:sp>
       <p:sp>
         <p:nvSpPr>
@@ -7461,7 +9198,7 @@
           <a:bodyPr wrap="square" rtlCol="0" anchor="ctr"/>
           <a:lstStyle/>
           <a:p>
-            <a:pPr indent="0" marL="0">
+            <a:pPr marL="0" indent="0">
               <a:buNone/>
             </a:pPr>
             <a:r>
@@ -7503,6 +9240,13 @@
             <a:prstDash val="solid"/>
           </a:ln>
         </p:spPr>
+        <p:txBody>
+          <a:bodyPr/>
+          <a:lstStyle/>
+          <a:p>
+            <a:endParaRPr lang="en-US"/>
+          </a:p>
+        </p:txBody>
       </p:sp>
       <p:sp>
         <p:nvSpPr>
@@ -7525,7 +9269,7 @@
           <a:bodyPr wrap="square" rtlCol="0" anchor="ctr"/>
           <a:lstStyle/>
           <a:p>
-            <a:pPr indent="0" marL="0">
+            <a:pPr marL="0" indent="0">
               <a:buNone/>
             </a:pPr>
             <a:r>
@@ -7567,6 +9311,13 @@
             <a:prstDash val="solid"/>
           </a:ln>
         </p:spPr>
+        <p:txBody>
+          <a:bodyPr/>
+          <a:lstStyle/>
+          <a:p>
+            <a:endParaRPr lang="en-US"/>
+          </a:p>
+        </p:txBody>
       </p:sp>
       <p:sp>
         <p:nvSpPr>
@@ -7589,7 +9340,7 @@
           <a:bodyPr wrap="square" rtlCol="0" anchor="ctr"/>
           <a:lstStyle/>
           <a:p>
-            <a:pPr indent="0" marL="0">
+            <a:pPr marL="0" indent="0">
               <a:buNone/>
             </a:pPr>
             <a:r>
@@ -7631,6 +9382,13 @@
             <a:prstDash val="solid"/>
           </a:ln>
         </p:spPr>
+        <p:txBody>
+          <a:bodyPr/>
+          <a:lstStyle/>
+          <a:p>
+            <a:endParaRPr lang="en-US"/>
+          </a:p>
+        </p:txBody>
       </p:sp>
       <p:sp>
         <p:nvSpPr>
@@ -7653,7 +9411,7 @@
           <a:bodyPr wrap="square" rtlCol="0" anchor="ctr"/>
           <a:lstStyle/>
           <a:p>
-            <a:pPr indent="0" marL="0">
+            <a:pPr marL="0" indent="0">
               <a:buNone/>
             </a:pPr>
             <a:r>
@@ -7692,7 +9450,7 @@
           <a:bodyPr wrap="square" rtlCol="0" anchor="ctr"/>
           <a:lstStyle/>
           <a:p>
-            <a:pPr indent="0" marL="0">
+            <a:pPr marL="0" indent="0">
               <a:buNone/>
             </a:pPr>
             <a:r>
@@ -7734,6 +9492,13 @@
             <a:prstDash val="solid"/>
           </a:ln>
         </p:spPr>
+        <p:txBody>
+          <a:bodyPr/>
+          <a:lstStyle/>
+          <a:p>
+            <a:endParaRPr lang="en-US"/>
+          </a:p>
+        </p:txBody>
       </p:sp>
       <p:sp>
         <p:nvSpPr>
@@ -7759,6 +9524,13 @@
             <a:prstDash val="solid"/>
           </a:ln>
         </p:spPr>
+        <p:txBody>
+          <a:bodyPr/>
+          <a:lstStyle/>
+          <a:p>
+            <a:endParaRPr lang="en-US"/>
+          </a:p>
+        </p:txBody>
       </p:sp>
       <p:sp>
         <p:nvSpPr>
@@ -7781,7 +9553,7 @@
           <a:bodyPr wrap="square" rtlCol="0" anchor="ctr"/>
           <a:lstStyle/>
           <a:p>
-            <a:pPr indent="0" marL="0">
+            <a:pPr marL="0" indent="0">
               <a:buNone/>
             </a:pPr>
             <a:r>
@@ -7820,7 +9592,7 @@
           <a:bodyPr wrap="square" rtlCol="0" anchor="ctr"/>
           <a:lstStyle/>
           <a:p>
-            <a:pPr indent="0" marL="0">
+            <a:pPr marL="0" indent="0">
               <a:buNone/>
             </a:pPr>
             <a:r>
@@ -7862,6 +9634,13 @@
             <a:prstDash val="solid"/>
           </a:ln>
         </p:spPr>
+        <p:txBody>
+          <a:bodyPr/>
+          <a:lstStyle/>
+          <a:p>
+            <a:endParaRPr lang="en-US"/>
+          </a:p>
+        </p:txBody>
       </p:sp>
       <p:sp>
         <p:nvSpPr>
@@ -7887,6 +9666,13 @@
             <a:prstDash val="solid"/>
           </a:ln>
         </p:spPr>
+        <p:txBody>
+          <a:bodyPr/>
+          <a:lstStyle/>
+          <a:p>
+            <a:endParaRPr lang="en-US"/>
+          </a:p>
+        </p:txBody>
       </p:sp>
       <p:sp>
         <p:nvSpPr>
@@ -7909,7 +9695,7 @@
           <a:bodyPr wrap="square" rtlCol="0" anchor="ctr"/>
           <a:lstStyle/>
           <a:p>
-            <a:pPr indent="0" marL="0">
+            <a:pPr marL="0" indent="0">
               <a:buNone/>
             </a:pPr>
             <a:r>
@@ -7948,7 +9734,7 @@
           <a:bodyPr wrap="square" rtlCol="0" anchor="ctr"/>
           <a:lstStyle/>
           <a:p>
-            <a:pPr indent="0" marL="0">
+            <a:pPr marL="0" indent="0">
               <a:buNone/>
             </a:pPr>
             <a:r>
@@ -7990,6 +9776,13 @@
             <a:prstDash val="solid"/>
           </a:ln>
         </p:spPr>
+        <p:txBody>
+          <a:bodyPr/>
+          <a:lstStyle/>
+          <a:p>
+            <a:endParaRPr lang="en-US"/>
+          </a:p>
+        </p:txBody>
       </p:sp>
       <p:sp>
         <p:nvSpPr>
@@ -8015,6 +9808,13 @@
             <a:prstDash val="solid"/>
           </a:ln>
         </p:spPr>
+        <p:txBody>
+          <a:bodyPr/>
+          <a:lstStyle/>
+          <a:p>
+            <a:endParaRPr lang="en-US"/>
+          </a:p>
+        </p:txBody>
       </p:sp>
       <p:sp>
         <p:nvSpPr>
@@ -8037,7 +9837,7 @@
           <a:bodyPr wrap="square" rtlCol="0" anchor="ctr"/>
           <a:lstStyle/>
           <a:p>
-            <a:pPr indent="0" marL="0">
+            <a:pPr marL="0" indent="0">
               <a:buNone/>
             </a:pPr>
             <a:r>
@@ -8076,7 +9876,7 @@
           <a:bodyPr wrap="square" rtlCol="0" anchor="ctr"/>
           <a:lstStyle/>
           <a:p>
-            <a:pPr indent="0" marL="0">
+            <a:pPr marL="0" indent="0">
               <a:buNone/>
             </a:pPr>
             <a:r>
@@ -8118,6 +9918,13 @@
             <a:prstDash val="solid"/>
           </a:ln>
         </p:spPr>
+        <p:txBody>
+          <a:bodyPr/>
+          <a:lstStyle/>
+          <a:p>
+            <a:endParaRPr lang="en-US"/>
+          </a:p>
+        </p:txBody>
       </p:sp>
       <p:sp>
         <p:nvSpPr>
@@ -8143,6 +9950,13 @@
             <a:prstDash val="solid"/>
           </a:ln>
         </p:spPr>
+        <p:txBody>
+          <a:bodyPr/>
+          <a:lstStyle/>
+          <a:p>
+            <a:endParaRPr lang="en-US"/>
+          </a:p>
+        </p:txBody>
       </p:sp>
       <p:sp>
         <p:nvSpPr>
@@ -8165,7 +9979,7 @@
           <a:bodyPr wrap="square" rtlCol="0" anchor="ctr"/>
           <a:lstStyle/>
           <a:p>
-            <a:pPr indent="0" marL="0">
+            <a:pPr marL="0" indent="0">
               <a:buNone/>
             </a:pPr>
             <a:r>
@@ -8204,7 +10018,7 @@
           <a:bodyPr wrap="square" rtlCol="0" anchor="ctr"/>
           <a:lstStyle/>
           <a:p>
-            <a:pPr indent="0" marL="0">
+            <a:pPr marL="0" indent="0">
               <a:buNone/>
             </a:pPr>
             <a:r>
@@ -8246,6 +10060,13 @@
             <a:prstDash val="solid"/>
           </a:ln>
         </p:spPr>
+        <p:txBody>
+          <a:bodyPr/>
+          <a:lstStyle/>
+          <a:p>
+            <a:endParaRPr lang="en-US"/>
+          </a:p>
+        </p:txBody>
       </p:sp>
       <p:sp>
         <p:nvSpPr>
@@ -8271,6 +10092,13 @@
             <a:prstDash val="solid"/>
           </a:ln>
         </p:spPr>
+        <p:txBody>
+          <a:bodyPr/>
+          <a:lstStyle/>
+          <a:p>
+            <a:endParaRPr lang="en-US"/>
+          </a:p>
+        </p:txBody>
       </p:sp>
       <p:sp>
         <p:nvSpPr>
@@ -8293,7 +10121,7 @@
           <a:bodyPr wrap="square" rtlCol="0" anchor="ctr"/>
           <a:lstStyle/>
           <a:p>
-            <a:pPr indent="0" marL="0">
+            <a:pPr marL="0" indent="0">
               <a:buNone/>
             </a:pPr>
             <a:r>
@@ -8332,7 +10160,7 @@
           <a:bodyPr wrap="square" rtlCol="0" anchor="ctr"/>
           <a:lstStyle/>
           <a:p>
-            <a:pPr indent="0" marL="0">
+            <a:pPr marL="0" indent="0">
               <a:buNone/>
             </a:pPr>
             <a:r>
@@ -8374,6 +10202,13 @@
             <a:prstDash val="solid"/>
           </a:ln>
         </p:spPr>
+        <p:txBody>
+          <a:bodyPr/>
+          <a:lstStyle/>
+          <a:p>
+            <a:endParaRPr lang="en-US"/>
+          </a:p>
+        </p:txBody>
       </p:sp>
     </p:spTree>
   </p:cSld>
@@ -8383,7 +10218,7 @@
 </p:sld>
 </file>
 
-<file path=ppt/slides/slide7.xml><?xml version="1.0" encoding="utf-8"?>
+<file path=ppt/slides/slide8.xml><?xml version="1.0" encoding="utf-8"?>
 <p:sld xmlns:a="http://schemas.openxmlformats.org/drawingml/2006/main" xmlns:r="http://schemas.openxmlformats.org/officeDocument/2006/relationships" xmlns:p="http://schemas.openxmlformats.org/presentationml/2006/main">
   <p:cSld name="Slide 7">
     <p:bg>
@@ -8391,6 +10226,7 @@
         <a:solidFill>
           <a:srgbClr val="0D1117"/>
         </a:solidFill>
+        <a:effectLst/>
       </p:bgPr>
     </p:bg>
     <p:spTree>
@@ -8431,6 +10267,13 @@
             <a:prstDash val="solid"/>
           </a:ln>
         </p:spPr>
+        <p:txBody>
+          <a:bodyPr/>
+          <a:lstStyle/>
+          <a:p>
+            <a:endParaRPr lang="en-US"/>
+          </a:p>
+        </p:txBody>
       </p:sp>
       <p:sp>
         <p:nvSpPr>
@@ -8453,7 +10296,7 @@
           <a:bodyPr wrap="square" rtlCol="0" anchor="ctr"/>
           <a:lstStyle/>
           <a:p>
-            <a:pPr indent="0" marL="0">
+            <a:pPr marL="0" indent="0">
               <a:buNone/>
             </a:pPr>
             <a:r>
@@ -8495,6 +10338,13 @@
             <a:prstDash val="solid"/>
           </a:ln>
         </p:spPr>
+        <p:txBody>
+          <a:bodyPr/>
+          <a:lstStyle/>
+          <a:p>
+            <a:endParaRPr lang="en-US"/>
+          </a:p>
+        </p:txBody>
       </p:sp>
       <p:sp>
         <p:nvSpPr>
@@ -8517,7 +10367,7 @@
           <a:bodyPr wrap="square" rtlCol="0" anchor="ctr"/>
           <a:lstStyle/>
           <a:p>
-            <a:pPr indent="0" marL="0">
+            <a:pPr marL="0" indent="0">
               <a:buNone/>
             </a:pPr>
             <a:r>
@@ -8559,13 +10409,20 @@
             <a:prstDash val="solid"/>
           </a:ln>
           <a:effectLst>
-            <a:outerShdw sx="100000" sy="100000" kx="0" ky="0" algn="bl" rotWithShape="0" blurRad="101600" dist="38100" dir="8100000">
+            <a:outerShdw blurRad="101600" dist="38100" dir="8100000" algn="bl" rotWithShape="0">
               <a:srgbClr val="000000">
                 <a:alpha val="30000"/>
               </a:srgbClr>
             </a:outerShdw>
           </a:effectLst>
         </p:spPr>
+        <p:txBody>
+          <a:bodyPr/>
+          <a:lstStyle/>
+          <a:p>
+            <a:endParaRPr lang="en-US"/>
+          </a:p>
+        </p:txBody>
       </p:sp>
       <p:sp>
         <p:nvSpPr>
@@ -8591,6 +10448,13 @@
             <a:prstDash val="solid"/>
           </a:ln>
         </p:spPr>
+        <p:txBody>
+          <a:bodyPr/>
+          <a:lstStyle/>
+          <a:p>
+            <a:endParaRPr lang="en-US"/>
+          </a:p>
+        </p:txBody>
       </p:sp>
       <p:sp>
         <p:nvSpPr>
@@ -8613,7 +10477,7 @@
           <a:bodyPr wrap="square" rtlCol="0" anchor="ctr"/>
           <a:lstStyle/>
           <a:p>
-            <a:pPr indent="0" marL="0">
+            <a:pPr marL="0" indent="0">
               <a:buNone/>
             </a:pPr>
             <a:r>
@@ -8652,7 +10516,7 @@
           <a:bodyPr wrap="square" rtlCol="0" anchor="ctr"/>
           <a:lstStyle/>
           <a:p>
-            <a:pPr indent="0" marL="0">
+            <a:pPr marL="0" indent="0">
               <a:buNone/>
             </a:pPr>
             <a:r>
@@ -8669,7 +10533,7 @@
             <a:endParaRPr lang="en-US" sz="1100" dirty="0"/>
           </a:p>
           <a:p>
-            <a:pPr indent="0" marL="0">
+            <a:pPr marL="0" indent="0">
               <a:buNone/>
             </a:pPr>
             <a:r>
@@ -8711,13 +10575,20 @@
             <a:prstDash val="solid"/>
           </a:ln>
           <a:effectLst>
-            <a:outerShdw sx="100000" sy="100000" kx="0" ky="0" algn="bl" rotWithShape="0" blurRad="101600" dist="38100" dir="8100000">
+            <a:outerShdw blurRad="101600" dist="38100" dir="8100000" algn="bl" rotWithShape="0">
               <a:srgbClr val="000000">
                 <a:alpha val="30000"/>
               </a:srgbClr>
             </a:outerShdw>
           </a:effectLst>
         </p:spPr>
+        <p:txBody>
+          <a:bodyPr/>
+          <a:lstStyle/>
+          <a:p>
+            <a:endParaRPr lang="en-US"/>
+          </a:p>
+        </p:txBody>
       </p:sp>
       <p:sp>
         <p:nvSpPr>
@@ -8743,6 +10614,13 @@
             <a:prstDash val="solid"/>
           </a:ln>
         </p:spPr>
+        <p:txBody>
+          <a:bodyPr/>
+          <a:lstStyle/>
+          <a:p>
+            <a:endParaRPr lang="en-US"/>
+          </a:p>
+        </p:txBody>
       </p:sp>
       <p:sp>
         <p:nvSpPr>
@@ -8765,7 +10643,7 @@
           <a:bodyPr wrap="square" rtlCol="0" anchor="ctr"/>
           <a:lstStyle/>
           <a:p>
-            <a:pPr indent="0" marL="0">
+            <a:pPr marL="0" indent="0">
               <a:buNone/>
             </a:pPr>
             <a:r>
@@ -8804,7 +10682,7 @@
           <a:bodyPr wrap="square" rtlCol="0" anchor="ctr"/>
           <a:lstStyle/>
           <a:p>
-            <a:pPr indent="0" marL="0">
+            <a:pPr marL="0" indent="0">
               <a:buNone/>
             </a:pPr>
             <a:r>
@@ -8821,7 +10699,7 @@
             <a:endParaRPr lang="en-US" sz="1100" dirty="0"/>
           </a:p>
           <a:p>
-            <a:pPr indent="0" marL="0">
+            <a:pPr marL="0" indent="0">
               <a:buNone/>
             </a:pPr>
             <a:r>
@@ -8863,13 +10741,20 @@
             <a:prstDash val="solid"/>
           </a:ln>
           <a:effectLst>
-            <a:outerShdw sx="100000" sy="100000" kx="0" ky="0" algn="bl" rotWithShape="0" blurRad="101600" dist="38100" dir="8100000">
+            <a:outerShdw blurRad="101600" dist="38100" dir="8100000" algn="bl" rotWithShape="0">
               <a:srgbClr val="000000">
                 <a:alpha val="30000"/>
               </a:srgbClr>
             </a:outerShdw>
           </a:effectLst>
         </p:spPr>
+        <p:txBody>
+          <a:bodyPr/>
+          <a:lstStyle/>
+          <a:p>
+            <a:endParaRPr lang="en-US"/>
+          </a:p>
+        </p:txBody>
       </p:sp>
       <p:sp>
         <p:nvSpPr>
@@ -8895,6 +10780,13 @@
             <a:prstDash val="solid"/>
           </a:ln>
         </p:spPr>
+        <p:txBody>
+          <a:bodyPr/>
+          <a:lstStyle/>
+          <a:p>
+            <a:endParaRPr lang="en-US"/>
+          </a:p>
+        </p:txBody>
       </p:sp>
       <p:sp>
         <p:nvSpPr>
@@ -8917,7 +10809,7 @@
           <a:bodyPr wrap="square" rtlCol="0" anchor="ctr"/>
           <a:lstStyle/>
           <a:p>
-            <a:pPr indent="0" marL="0">
+            <a:pPr marL="0" indent="0">
               <a:buNone/>
             </a:pPr>
             <a:r>
@@ -8956,7 +10848,7 @@
           <a:bodyPr wrap="square" rtlCol="0" anchor="ctr"/>
           <a:lstStyle/>
           <a:p>
-            <a:pPr indent="0" marL="0">
+            <a:pPr marL="0" indent="0">
               <a:buNone/>
             </a:pPr>
             <a:r>
@@ -8973,7 +10865,7 @@
             <a:endParaRPr lang="en-US" sz="1100" dirty="0"/>
           </a:p>
           <a:p>
-            <a:pPr indent="0" marL="0">
+            <a:pPr marL="0" indent="0">
               <a:buNone/>
             </a:pPr>
             <a:r>
@@ -9015,13 +10907,20 @@
             <a:prstDash val="solid"/>
           </a:ln>
           <a:effectLst>
-            <a:outerShdw sx="100000" sy="100000" kx="0" ky="0" algn="bl" rotWithShape="0" blurRad="101600" dist="38100" dir="8100000">
+            <a:outerShdw blurRad="101600" dist="38100" dir="8100000" algn="bl" rotWithShape="0">
               <a:srgbClr val="000000">
                 <a:alpha val="30000"/>
               </a:srgbClr>
             </a:outerShdw>
           </a:effectLst>
         </p:spPr>
+        <p:txBody>
+          <a:bodyPr/>
+          <a:lstStyle/>
+          <a:p>
+            <a:endParaRPr lang="en-US"/>
+          </a:p>
+        </p:txBody>
       </p:sp>
       <p:sp>
         <p:nvSpPr>
@@ -9047,6 +10946,13 @@
             <a:prstDash val="solid"/>
           </a:ln>
         </p:spPr>
+        <p:txBody>
+          <a:bodyPr/>
+          <a:lstStyle/>
+          <a:p>
+            <a:endParaRPr lang="en-US"/>
+          </a:p>
+        </p:txBody>
       </p:sp>
       <p:sp>
         <p:nvSpPr>
@@ -9069,7 +10975,7 @@
           <a:bodyPr wrap="square" rtlCol="0" anchor="ctr"/>
           <a:lstStyle/>
           <a:p>
-            <a:pPr indent="0" marL="0">
+            <a:pPr marL="0" indent="0">
               <a:buNone/>
             </a:pPr>
             <a:r>
@@ -9108,7 +11014,7 @@
           <a:bodyPr wrap="square" rtlCol="0" anchor="ctr"/>
           <a:lstStyle/>
           <a:p>
-            <a:pPr indent="0" marL="0">
+            <a:pPr marL="0" indent="0">
               <a:buNone/>
             </a:pPr>
             <a:r>
@@ -9125,7 +11031,7 @@
             <a:endParaRPr lang="en-US" sz="1100" dirty="0"/>
           </a:p>
           <a:p>
-            <a:pPr indent="0" marL="0">
+            <a:pPr marL="0" indent="0">
               <a:buNone/>
             </a:pPr>
             <a:r>
@@ -9167,13 +11073,20 @@
             <a:prstDash val="solid"/>
           </a:ln>
           <a:effectLst>
-            <a:outerShdw sx="100000" sy="100000" kx="0" ky="0" algn="bl" rotWithShape="0" blurRad="101600" dist="38100" dir="8100000">
+            <a:outerShdw blurRad="101600" dist="38100" dir="8100000" algn="bl" rotWithShape="0">
               <a:srgbClr val="000000">
                 <a:alpha val="30000"/>
               </a:srgbClr>
             </a:outerShdw>
           </a:effectLst>
         </p:spPr>
+        <p:txBody>
+          <a:bodyPr/>
+          <a:lstStyle/>
+          <a:p>
+            <a:endParaRPr lang="en-US"/>
+          </a:p>
+        </p:txBody>
       </p:sp>
       <p:sp>
         <p:nvSpPr>
@@ -9199,6 +11112,13 @@
             <a:prstDash val="solid"/>
           </a:ln>
         </p:spPr>
+        <p:txBody>
+          <a:bodyPr/>
+          <a:lstStyle/>
+          <a:p>
+            <a:endParaRPr lang="en-US"/>
+          </a:p>
+        </p:txBody>
       </p:sp>
       <p:sp>
         <p:nvSpPr>
@@ -9221,7 +11141,7 @@
           <a:bodyPr wrap="square" rtlCol="0" anchor="ctr"/>
           <a:lstStyle/>
           <a:p>
-            <a:pPr indent="0" marL="0">
+            <a:pPr marL="0" indent="0">
               <a:buNone/>
             </a:pPr>
             <a:r>
@@ -9260,7 +11180,7 @@
           <a:bodyPr wrap="square" rtlCol="0" anchor="ctr"/>
           <a:lstStyle/>
           <a:p>
-            <a:pPr indent="0" marL="0">
+            <a:pPr marL="0" indent="0">
               <a:buNone/>
             </a:pPr>
             <a:r>
@@ -9277,7 +11197,7 @@
             <a:endParaRPr lang="en-US" sz="1100" dirty="0"/>
           </a:p>
           <a:p>
-            <a:pPr indent="0" marL="0">
+            <a:pPr marL="0" indent="0">
               <a:buNone/>
             </a:pPr>
             <a:r>
@@ -9319,13 +11239,20 @@
             <a:prstDash val="solid"/>
           </a:ln>
           <a:effectLst>
-            <a:outerShdw sx="100000" sy="100000" kx="0" ky="0" algn="bl" rotWithShape="0" blurRad="101600" dist="38100" dir="8100000">
+            <a:outerShdw blurRad="101600" dist="38100" dir="8100000" algn="bl" rotWithShape="0">
               <a:srgbClr val="000000">
                 <a:alpha val="30000"/>
               </a:srgbClr>
             </a:outerShdw>
           </a:effectLst>
         </p:spPr>
+        <p:txBody>
+          <a:bodyPr/>
+          <a:lstStyle/>
+          <a:p>
+            <a:endParaRPr lang="en-US"/>
+          </a:p>
+        </p:txBody>
       </p:sp>
       <p:sp>
         <p:nvSpPr>
@@ -9351,6 +11278,13 @@
             <a:prstDash val="solid"/>
           </a:ln>
         </p:spPr>
+        <p:txBody>
+          <a:bodyPr/>
+          <a:lstStyle/>
+          <a:p>
+            <a:endParaRPr lang="en-US"/>
+          </a:p>
+        </p:txBody>
       </p:sp>
       <p:sp>
         <p:nvSpPr>
@@ -9373,7 +11307,7 @@
           <a:bodyPr wrap="square" rtlCol="0" anchor="ctr"/>
           <a:lstStyle/>
           <a:p>
-            <a:pPr indent="0" marL="0">
+            <a:pPr marL="0" indent="0">
               <a:buNone/>
             </a:pPr>
             <a:r>
@@ -9412,7 +11346,7 @@
           <a:bodyPr wrap="square" rtlCol="0" anchor="ctr"/>
           <a:lstStyle/>
           <a:p>
-            <a:pPr indent="0" marL="0">
+            <a:pPr marL="0" indent="0">
               <a:buNone/>
             </a:pPr>
             <a:r>
@@ -9429,7 +11363,7 @@
             <a:endParaRPr lang="en-US" sz="1100" dirty="0"/>
           </a:p>
           <a:p>
-            <a:pPr indent="0" marL="0">
+            <a:pPr marL="0" indent="0">
               <a:buNone/>
             </a:pPr>
             <a:r>
@@ -9471,6 +11405,13 @@
             <a:prstDash val="solid"/>
           </a:ln>
         </p:spPr>
+        <p:txBody>
+          <a:bodyPr/>
+          <a:lstStyle/>
+          <a:p>
+            <a:endParaRPr lang="en-US"/>
+          </a:p>
+        </p:txBody>
       </p:sp>
     </p:spTree>
   </p:cSld>
@@ -9480,7 +11421,7 @@
 </p:sld>
 </file>
 
-<file path=ppt/slides/slide8.xml><?xml version="1.0" encoding="utf-8"?>
+<file path=ppt/slides/slide9.xml><?xml version="1.0" encoding="utf-8"?>
 <p:sld xmlns:a="http://schemas.openxmlformats.org/drawingml/2006/main" xmlns:r="http://schemas.openxmlformats.org/officeDocument/2006/relationships" xmlns:p="http://schemas.openxmlformats.org/presentationml/2006/main">
   <p:cSld name="Slide 8">
     <p:bg>
@@ -9488,6 +11429,7 @@
         <a:solidFill>
           <a:srgbClr val="0D1117"/>
         </a:solidFill>
+        <a:effectLst/>
       </p:bgPr>
     </p:bg>
     <p:spTree>
@@ -9528,6 +11470,13 @@
             <a:prstDash val="solid"/>
           </a:ln>
         </p:spPr>
+        <p:txBody>
+          <a:bodyPr/>
+          <a:lstStyle/>
+          <a:p>
+            <a:endParaRPr lang="en-US"/>
+          </a:p>
+        </p:txBody>
       </p:sp>
       <p:sp>
         <p:nvSpPr>
@@ -9550,7 +11499,7 @@
           <a:bodyPr wrap="square" rtlCol="0" anchor="ctr"/>
           <a:lstStyle/>
           <a:p>
-            <a:pPr indent="0" marL="0">
+            <a:pPr marL="0" indent="0">
               <a:buNone/>
             </a:pPr>
             <a:r>
@@ -9592,6 +11541,13 @@
             <a:prstDash val="solid"/>
           </a:ln>
         </p:spPr>
+        <p:txBody>
+          <a:bodyPr/>
+          <a:lstStyle/>
+          <a:p>
+            <a:endParaRPr lang="en-US"/>
+          </a:p>
+        </p:txBody>
       </p:sp>
       <p:sp>
         <p:nvSpPr>
@@ -9614,7 +11570,7 @@
           <a:bodyPr wrap="square" rtlCol="0" anchor="ctr"/>
           <a:lstStyle/>
           <a:p>
-            <a:pPr indent="0" marL="0">
+            <a:pPr marL="0" indent="0">
               <a:buNone/>
             </a:pPr>
             <a:r>
@@ -9656,6 +11612,13 @@
             <a:prstDash val="solid"/>
           </a:ln>
         </p:spPr>
+        <p:txBody>
+          <a:bodyPr/>
+          <a:lstStyle/>
+          <a:p>
+            <a:endParaRPr lang="en-US"/>
+          </a:p>
+        </p:txBody>
       </p:sp>
       <p:sp>
         <p:nvSpPr>
@@ -9678,7 +11641,7 @@
           <a:bodyPr wrap="square" rtlCol="0" anchor="ctr"/>
           <a:lstStyle/>
           <a:p>
-            <a:pPr indent="0" marL="0">
+            <a:pPr marL="0" indent="0">
               <a:buNone/>
             </a:pPr>
             <a:r>
@@ -9717,7 +11680,7 @@
           <a:bodyPr wrap="square" rtlCol="0" anchor="ctr"/>
           <a:lstStyle/>
           <a:p>
-            <a:pPr indent="0" marL="0">
+            <a:pPr marL="0" indent="0">
               <a:buNone/>
             </a:pPr>
             <a:r>
@@ -9756,7 +11719,7 @@
           <a:bodyPr wrap="square" rtlCol="0" anchor="ctr"/>
           <a:lstStyle/>
           <a:p>
-            <a:pPr indent="0" marL="0">
+            <a:pPr marL="0" indent="0">
               <a:buNone/>
             </a:pPr>
             <a:r>
@@ -9795,7 +11758,7 @@
           <a:bodyPr wrap="square" rtlCol="0" anchor="ctr"/>
           <a:lstStyle/>
           <a:p>
-            <a:pPr indent="0" marL="0">
+            <a:pPr marL="0" indent="0">
               <a:buNone/>
             </a:pPr>
             <a:r>
@@ -9834,7 +11797,7 @@
           <a:bodyPr wrap="square" rtlCol="0" anchor="ctr"/>
           <a:lstStyle/>
           <a:p>
-            <a:pPr indent="0" marL="0">
+            <a:pPr marL="0" indent="0">
               <a:buNone/>
             </a:pPr>
             <a:r>
@@ -9873,7 +11836,7 @@
           <a:bodyPr wrap="square" rtlCol="0" anchor="ctr"/>
           <a:lstStyle/>
           <a:p>
-            <a:pPr indent="0" marL="0">
+            <a:pPr marL="0" indent="0">
               <a:buNone/>
             </a:pPr>
             <a:r>
@@ -9912,7 +11875,7 @@
           <a:bodyPr wrap="square" rtlCol="0" anchor="ctr"/>
           <a:lstStyle/>
           <a:p>
-            <a:pPr indent="0" marL="0">
+            <a:pPr marL="0" indent="0">
               <a:buNone/>
             </a:pPr>
             <a:r>
@@ -9951,7 +11914,7 @@
           <a:bodyPr wrap="square" rtlCol="0" anchor="ctr"/>
           <a:lstStyle/>
           <a:p>
-            <a:pPr indent="0" marL="0">
+            <a:pPr marL="0" indent="0">
               <a:buNone/>
             </a:pPr>
             <a:r>
@@ -9990,7 +11953,7 @@
           <a:bodyPr wrap="square" rtlCol="0" anchor="ctr"/>
           <a:lstStyle/>
           <a:p>
-            <a:pPr indent="0" marL="0">
+            <a:pPr marL="0" indent="0">
               <a:buNone/>
             </a:pPr>
             <a:r>
@@ -10029,7 +11992,7 @@
           <a:bodyPr wrap="square" rtlCol="0" anchor="ctr"/>
           <a:lstStyle/>
           <a:p>
-            <a:pPr indent="0" marL="0">
+            <a:pPr marL="0" indent="0">
               <a:buNone/>
             </a:pPr>
             <a:r>
@@ -10068,7 +12031,7 @@
           <a:bodyPr wrap="square" rtlCol="0" anchor="ctr"/>
           <a:lstStyle/>
           <a:p>
-            <a:pPr indent="0" marL="0">
+            <a:pPr marL="0" indent="0">
               <a:buNone/>
             </a:pPr>
             <a:r>
@@ -10110,6 +12073,13 @@
             <a:prstDash val="solid"/>
           </a:ln>
         </p:spPr>
+        <p:txBody>
+          <a:bodyPr/>
+          <a:lstStyle/>
+          <a:p>
+            <a:endParaRPr lang="en-US"/>
+          </a:p>
+        </p:txBody>
       </p:sp>
       <p:sp>
         <p:nvSpPr>
@@ -10132,7 +12102,7 @@
           <a:bodyPr wrap="square" rtlCol="0" anchor="ctr"/>
           <a:lstStyle/>
           <a:p>
-            <a:pPr indent="0" marL="0">
+            <a:pPr marL="0" indent="0">
               <a:buNone/>
             </a:pPr>
             <a:r>
@@ -10171,7 +12141,7 @@
           <a:bodyPr wrap="square" rtlCol="0" anchor="ctr"/>
           <a:lstStyle/>
           <a:p>
-            <a:pPr indent="0" marL="0">
+            <a:pPr marL="0" indent="0">
               <a:buNone/>
             </a:pPr>
             <a:r>
@@ -10213,6 +12183,13 @@
             <a:prstDash val="solid"/>
           </a:ln>
         </p:spPr>
+        <p:txBody>
+          <a:bodyPr/>
+          <a:lstStyle/>
+          <a:p>
+            <a:endParaRPr lang="en-US"/>
+          </a:p>
+        </p:txBody>
       </p:sp>
       <p:sp>
         <p:nvSpPr>
@@ -10235,7 +12212,7 @@
           <a:bodyPr wrap="square" rtlCol="0" anchor="ctr"/>
           <a:lstStyle/>
           <a:p>
-            <a:pPr indent="0" marL="0">
+            <a:pPr marL="0" indent="0">
               <a:buNone/>
             </a:pPr>
             <a:r>
@@ -10274,7 +12251,7 @@
           <a:bodyPr wrap="square" rtlCol="0" anchor="ctr"/>
           <a:lstStyle/>
           <a:p>
-            <a:pPr indent="0" marL="0">
+            <a:pPr marL="0" indent="0">
               <a:buNone/>
             </a:pPr>
             <a:r>
@@ -10316,6 +12293,13 @@
             <a:prstDash val="solid"/>
           </a:ln>
         </p:spPr>
+        <p:txBody>
+          <a:bodyPr/>
+          <a:lstStyle/>
+          <a:p>
+            <a:endParaRPr lang="en-US"/>
+          </a:p>
+        </p:txBody>
       </p:sp>
       <p:sp>
         <p:nvSpPr>
@@ -10338,7 +12322,7 @@
           <a:bodyPr wrap="square" rtlCol="0" anchor="ctr"/>
           <a:lstStyle/>
           <a:p>
-            <a:pPr indent="0" marL="0">
+            <a:pPr marL="0" indent="0">
               <a:buNone/>
             </a:pPr>
             <a:r>
@@ -10377,7 +12361,7 @@
           <a:bodyPr wrap="square" rtlCol="0" anchor="ctr"/>
           <a:lstStyle/>
           <a:p>
-            <a:pPr indent="0" marL="0">
+            <a:pPr marL="0" indent="0">
               <a:buNone/>
             </a:pPr>
             <a:r>
@@ -10419,6 +12403,13 @@
             <a:prstDash val="solid"/>
           </a:ln>
         </p:spPr>
+        <p:txBody>
+          <a:bodyPr/>
+          <a:lstStyle/>
+          <a:p>
+            <a:endParaRPr lang="en-US"/>
+          </a:p>
+        </p:txBody>
       </p:sp>
       <p:sp>
         <p:nvSpPr>
@@ -10441,7 +12432,7 @@
           <a:bodyPr wrap="square" rtlCol="0" anchor="ctr"/>
           <a:lstStyle/>
           <a:p>
-            <a:pPr indent="0" marL="0">
+            <a:pPr marL="0" indent="0">
               <a:buNone/>
             </a:pPr>
             <a:r>
@@ -10480,7 +12471,7 @@
           <a:bodyPr wrap="square" rtlCol="0" anchor="ctr"/>
           <a:lstStyle/>
           <a:p>
-            <a:pPr indent="0" marL="0">
+            <a:pPr marL="0" indent="0">
               <a:buNone/>
             </a:pPr>
             <a:r>
@@ -10522,539 +12513,13 @@
             <a:prstDash val="solid"/>
           </a:ln>
         </p:spPr>
-      </p:sp>
-    </p:spTree>
-  </p:cSld>
-  <p:clrMapOvr>
-    <a:masterClrMapping/>
-  </p:clrMapOvr>
-</p:sld>
-</file>
-
-<file path=ppt/slides/slide9.xml><?xml version="1.0" encoding="utf-8"?>
-<p:sld xmlns:a="http://schemas.openxmlformats.org/drawingml/2006/main" xmlns:r="http://schemas.openxmlformats.org/officeDocument/2006/relationships" xmlns:p="http://schemas.openxmlformats.org/presentationml/2006/main">
-  <p:cSld name="Slide 9">
-    <p:bg>
-      <p:bgPr>
-        <a:solidFill>
-          <a:srgbClr val="0D1117"/>
-        </a:solidFill>
-      </p:bgPr>
-    </p:bg>
-    <p:spTree>
-      <p:nvGrpSpPr>
-        <p:cNvPr id="1" name=""/>
-        <p:cNvGrpSpPr/>
-        <p:nvPr/>
-      </p:nvGrpSpPr>
-      <p:grpSpPr>
-        <a:xfrm>
-          <a:off x="0" y="0"/>
-          <a:ext cx="0" cy="0"/>
-          <a:chOff x="0" y="0"/>
-          <a:chExt cx="0" cy="0"/>
-        </a:xfrm>
-      </p:grpSpPr>
-      <p:sp>
-        <p:nvSpPr>
-          <p:cNvPr id="2" name="Shape 0"/>
-          <p:cNvSpPr/>
-          <p:nvPr/>
-        </p:nvSpPr>
-        <p:spPr>
-          <a:xfrm>
-            <a:off x="0" y="0"/>
-            <a:ext cx="9144000" cy="54864"/>
-          </a:xfrm>
-          <a:prstGeom prst="rect">
-            <a:avLst/>
-          </a:prstGeom>
-          <a:solidFill>
-            <a:srgbClr val="58A6FF"/>
-          </a:solidFill>
-          <a:ln w="12700">
-            <a:solidFill>
-              <a:srgbClr val="58A6FF"/>
-            </a:solidFill>
-            <a:prstDash val="solid"/>
-          </a:ln>
-        </p:spPr>
-      </p:sp>
-      <p:sp>
-        <p:nvSpPr>
-          <p:cNvPr id="3" name="Text 1"/>
-          <p:cNvSpPr/>
-          <p:nvPr/>
-        </p:nvSpPr>
-        <p:spPr>
-          <a:xfrm>
-            <a:off x="457200" y="822960"/>
-            <a:ext cx="8229600" cy="1097280"/>
-          </a:xfrm>
-          <a:prstGeom prst="rect">
-            <a:avLst/>
-          </a:prstGeom>
-          <a:noFill/>
-          <a:ln/>
-        </p:spPr>
-        <p:txBody>
-          <a:bodyPr wrap="square" rtlCol="0" anchor="ctr"/>
-          <a:lstStyle/>
-          <a:p>
-            <a:pPr algn="ctr" indent="0" marL="0">
-              <a:buNone/>
-            </a:pPr>
-            <a:r>
-              <a:rPr lang="en-US" sz="6400" b="1" spc="400" kern="0" dirty="0">
-                <a:solidFill>
-                  <a:srgbClr val="58A6FF"/>
-                </a:solidFill>
-                <a:latin typeface="Consolas" pitchFamily="34" charset="0"/>
-                <a:ea typeface="Consolas" pitchFamily="34" charset="-122"/>
-                <a:cs typeface="Consolas" pitchFamily="34" charset="-120"/>
-              </a:rPr>
-              <a:t>Thank You</a:t>
-            </a:r>
-            <a:endParaRPr lang="en-US" sz="6400" dirty="0"/>
-          </a:p>
-        </p:txBody>
-      </p:sp>
-      <p:sp>
-        <p:nvSpPr>
-          <p:cNvPr id="4" name="Text 2"/>
-          <p:cNvSpPr/>
-          <p:nvPr/>
-        </p:nvSpPr>
-        <p:spPr>
-          <a:xfrm>
-            <a:off x="457200" y="2011680"/>
-            <a:ext cx="8229600" cy="548640"/>
-          </a:xfrm>
-          <a:prstGeom prst="rect">
-            <a:avLst/>
-          </a:prstGeom>
-          <a:noFill/>
-          <a:ln/>
-        </p:spPr>
-        <p:txBody>
-          <a:bodyPr wrap="square" rtlCol="0" anchor="ctr"/>
-          <a:lstStyle/>
-          <a:p>
-            <a:pPr algn="ctr" indent="0" marL="0">
-              <a:buNone/>
-            </a:pPr>
-            <a:r>
-              <a:rPr lang="en-US" sz="2200" dirty="0">
-                <a:solidFill>
-                  <a:srgbClr val="7D8590"/>
-                </a:solidFill>
-                <a:latin typeface="Calibri" pitchFamily="34" charset="0"/>
-                <a:ea typeface="Calibri" pitchFamily="34" charset="-122"/>
-                <a:cs typeface="Calibri" pitchFamily="34" charset="-120"/>
-              </a:rPr>
-              <a:t>Questions &amp; Discussion</a:t>
-            </a:r>
-            <a:endParaRPr lang="en-US" sz="2200" dirty="0"/>
-          </a:p>
-        </p:txBody>
-      </p:sp>
-      <p:sp>
-        <p:nvSpPr>
-          <p:cNvPr id="5" name="Shape 3"/>
-          <p:cNvSpPr/>
-          <p:nvPr/>
-        </p:nvSpPr>
-        <p:spPr>
-          <a:xfrm>
-            <a:off x="2743200" y="2651760"/>
-            <a:ext cx="3657600" cy="36576"/>
-          </a:xfrm>
-          <a:prstGeom prst="rect">
-            <a:avLst/>
-          </a:prstGeom>
-          <a:solidFill>
-            <a:srgbClr val="30363D"/>
-          </a:solidFill>
-          <a:ln w="12700">
-            <a:solidFill>
-              <a:srgbClr val="30363D"/>
-            </a:solidFill>
-            <a:prstDash val="solid"/>
-          </a:ln>
-        </p:spPr>
-      </p:sp>
-      <p:sp>
-        <p:nvSpPr>
-          <p:cNvPr id="6" name="Text 4"/>
-          <p:cNvSpPr/>
-          <p:nvPr/>
-        </p:nvSpPr>
-        <p:spPr>
-          <a:xfrm>
-            <a:off x="914400" y="2926080"/>
-            <a:ext cx="1645920" cy="731520"/>
-          </a:xfrm>
-          <a:prstGeom prst="rect">
-            <a:avLst/>
-          </a:prstGeom>
-          <a:noFill/>
-          <a:ln/>
-        </p:spPr>
-        <p:txBody>
-          <a:bodyPr wrap="square" rtlCol="0" anchor="ctr"/>
-          <a:lstStyle/>
-          <a:p>
-            <a:pPr algn="ctr" indent="0" marL="0">
-              <a:buNone/>
-            </a:pPr>
-            <a:r>
-              <a:rPr lang="en-US" sz="3600" b="1" dirty="0">
-                <a:solidFill>
-                  <a:srgbClr val="58A6FF"/>
-                </a:solidFill>
-                <a:latin typeface="Consolas" pitchFamily="34" charset="0"/>
-                <a:ea typeface="Consolas" pitchFamily="34" charset="-122"/>
-                <a:cs typeface="Consolas" pitchFamily="34" charset="-120"/>
-              </a:rPr>
-              <a:t>30</a:t>
-            </a:r>
-            <a:endParaRPr lang="en-US" sz="3600" dirty="0"/>
-          </a:p>
-        </p:txBody>
-      </p:sp>
-      <p:sp>
-        <p:nvSpPr>
-          <p:cNvPr id="7" name="Text 5"/>
-          <p:cNvSpPr/>
-          <p:nvPr/>
-        </p:nvSpPr>
-        <p:spPr>
-          <a:xfrm>
-            <a:off x="914400" y="3657600"/>
-            <a:ext cx="1645920" cy="365760"/>
-          </a:xfrm>
-          <a:prstGeom prst="rect">
-            <a:avLst/>
-          </a:prstGeom>
-          <a:noFill/>
-          <a:ln/>
-        </p:spPr>
-        <p:txBody>
-          <a:bodyPr wrap="square" rtlCol="0" anchor="ctr"/>
-          <a:lstStyle/>
-          <a:p>
-            <a:pPr algn="ctr" indent="0" marL="0">
-              <a:buNone/>
-            </a:pPr>
-            <a:r>
-              <a:rPr lang="en-US" sz="1300" dirty="0">
-                <a:solidFill>
-                  <a:srgbClr val="7D8590"/>
-                </a:solidFill>
-                <a:latin typeface="Calibri" pitchFamily="34" charset="0"/>
-                <a:ea typeface="Calibri" pitchFamily="34" charset="-122"/>
-                <a:cs typeface="Calibri" pitchFamily="34" charset="-120"/>
-              </a:rPr>
-              <a:t>Questions</a:t>
-            </a:r>
-            <a:endParaRPr lang="en-US" sz="1300" dirty="0"/>
-          </a:p>
-        </p:txBody>
-      </p:sp>
-      <p:sp>
-        <p:nvSpPr>
-          <p:cNvPr id="8" name="Text 6"/>
-          <p:cNvSpPr/>
-          <p:nvPr/>
-        </p:nvSpPr>
-        <p:spPr>
-          <a:xfrm>
-            <a:off x="2834640" y="2926080"/>
-            <a:ext cx="1645920" cy="731520"/>
-          </a:xfrm>
-          <a:prstGeom prst="rect">
-            <a:avLst/>
-          </a:prstGeom>
-          <a:noFill/>
-          <a:ln/>
-        </p:spPr>
-        <p:txBody>
-          <a:bodyPr wrap="square" rtlCol="0" anchor="ctr"/>
-          <a:lstStyle/>
-          <a:p>
-            <a:pPr algn="ctr" indent="0" marL="0">
-              <a:buNone/>
-            </a:pPr>
-            <a:r>
-              <a:rPr lang="en-US" sz="3600" b="1" dirty="0">
-                <a:solidFill>
-                  <a:srgbClr val="58A6FF"/>
-                </a:solidFill>
-                <a:latin typeface="Consolas" pitchFamily="34" charset="0"/>
-                <a:ea typeface="Consolas" pitchFamily="34" charset="-122"/>
-                <a:cs typeface="Consolas" pitchFamily="34" charset="-120"/>
-              </a:rPr>
-              <a:t>8</a:t>
-            </a:r>
-            <a:endParaRPr lang="en-US" sz="3600" dirty="0"/>
-          </a:p>
-        </p:txBody>
-      </p:sp>
-      <p:sp>
-        <p:nvSpPr>
-          <p:cNvPr id="9" name="Text 7"/>
-          <p:cNvSpPr/>
-          <p:nvPr/>
-        </p:nvSpPr>
-        <p:spPr>
-          <a:xfrm>
-            <a:off x="2834640" y="3657600"/>
-            <a:ext cx="1645920" cy="365760"/>
-          </a:xfrm>
-          <a:prstGeom prst="rect">
-            <a:avLst/>
-          </a:prstGeom>
-          <a:noFill/>
-          <a:ln/>
-        </p:spPr>
-        <p:txBody>
-          <a:bodyPr wrap="square" rtlCol="0" anchor="ctr"/>
-          <a:lstStyle/>
-          <a:p>
-            <a:pPr algn="ctr" indent="0" marL="0">
-              <a:buNone/>
-            </a:pPr>
-            <a:r>
-              <a:rPr lang="en-US" sz="1300" dirty="0">
-                <a:solidFill>
-                  <a:srgbClr val="7D8590"/>
-                </a:solidFill>
-                <a:latin typeface="Calibri" pitchFamily="34" charset="0"/>
-                <a:ea typeface="Calibri" pitchFamily="34" charset="-122"/>
-                <a:cs typeface="Calibri" pitchFamily="34" charset="-120"/>
-              </a:rPr>
-              <a:t>Source Files</a:t>
-            </a:r>
-            <a:endParaRPr lang="en-US" sz="1300" dirty="0"/>
-          </a:p>
-        </p:txBody>
-      </p:sp>
-      <p:sp>
-        <p:nvSpPr>
-          <p:cNvPr id="10" name="Text 8"/>
-          <p:cNvSpPr/>
-          <p:nvPr/>
-        </p:nvSpPr>
-        <p:spPr>
-          <a:xfrm>
-            <a:off x="4754880" y="2926080"/>
-            <a:ext cx="1645920" cy="731520"/>
-          </a:xfrm>
-          <a:prstGeom prst="rect">
-            <a:avLst/>
-          </a:prstGeom>
-          <a:noFill/>
-          <a:ln/>
-        </p:spPr>
-        <p:txBody>
-          <a:bodyPr wrap="square" rtlCol="0" anchor="ctr"/>
-          <a:lstStyle/>
-          <a:p>
-            <a:pPr algn="ctr" indent="0" marL="0">
-              <a:buNone/>
-            </a:pPr>
-            <a:r>
-              <a:rPr lang="en-US" sz="3600" b="1" dirty="0">
-                <a:solidFill>
-                  <a:srgbClr val="58A6FF"/>
-                </a:solidFill>
-                <a:latin typeface="Consolas" pitchFamily="34" charset="0"/>
-                <a:ea typeface="Consolas" pitchFamily="34" charset="-122"/>
-                <a:cs typeface="Consolas" pitchFamily="34" charset="-120"/>
-              </a:rPr>
-              <a:t>100%</a:t>
-            </a:r>
-            <a:endParaRPr lang="en-US" sz="3600" dirty="0"/>
-          </a:p>
-        </p:txBody>
-      </p:sp>
-      <p:sp>
-        <p:nvSpPr>
-          <p:cNvPr id="11" name="Text 9"/>
-          <p:cNvSpPr/>
-          <p:nvPr/>
-        </p:nvSpPr>
-        <p:spPr>
-          <a:xfrm>
-            <a:off x="4754880" y="3657600"/>
-            <a:ext cx="1645920" cy="365760"/>
-          </a:xfrm>
-          <a:prstGeom prst="rect">
-            <a:avLst/>
-          </a:prstGeom>
-          <a:noFill/>
-          <a:ln/>
-        </p:spPr>
-        <p:txBody>
-          <a:bodyPr wrap="square" rtlCol="0" anchor="ctr"/>
-          <a:lstStyle/>
-          <a:p>
-            <a:pPr algn="ctr" indent="0" marL="0">
-              <a:buNone/>
-            </a:pPr>
-            <a:r>
-              <a:rPr lang="en-US" sz="1300" dirty="0">
-                <a:solidFill>
-                  <a:srgbClr val="7D8590"/>
-                </a:solidFill>
-                <a:latin typeface="Calibri" pitchFamily="34" charset="0"/>
-                <a:ea typeface="Calibri" pitchFamily="34" charset="-122"/>
-                <a:cs typeface="Calibri" pitchFamily="34" charset="-120"/>
-              </a:rPr>
-              <a:t>C++</a:t>
-            </a:r>
-            <a:endParaRPr lang="en-US" sz="1300" dirty="0"/>
-          </a:p>
-        </p:txBody>
-      </p:sp>
-      <p:sp>
-        <p:nvSpPr>
-          <p:cNvPr id="12" name="Text 10"/>
-          <p:cNvSpPr/>
-          <p:nvPr/>
-        </p:nvSpPr>
-        <p:spPr>
-          <a:xfrm>
-            <a:off x="6675120" y="2926080"/>
-            <a:ext cx="1645920" cy="731520"/>
-          </a:xfrm>
-          <a:prstGeom prst="rect">
-            <a:avLst/>
-          </a:prstGeom>
-          <a:noFill/>
-          <a:ln/>
-        </p:spPr>
-        <p:txBody>
-          <a:bodyPr wrap="square" rtlCol="0" anchor="ctr"/>
-          <a:lstStyle/>
-          <a:p>
-            <a:pPr algn="ctr" indent="0" marL="0">
-              <a:buNone/>
-            </a:pPr>
-            <a:r>
-              <a:rPr lang="en-US" sz="3600" b="1" dirty="0">
-                <a:solidFill>
-                  <a:srgbClr val="58A6FF"/>
-                </a:solidFill>
-                <a:latin typeface="Consolas" pitchFamily="34" charset="0"/>
-                <a:ea typeface="Consolas" pitchFamily="34" charset="-122"/>
-                <a:cs typeface="Consolas" pitchFamily="34" charset="-120"/>
-              </a:rPr>
-              <a:t>2026</a:t>
-            </a:r>
-            <a:endParaRPr lang="en-US" sz="3600" dirty="0"/>
-          </a:p>
-        </p:txBody>
-      </p:sp>
-      <p:sp>
-        <p:nvSpPr>
-          <p:cNvPr id="13" name="Text 11"/>
-          <p:cNvSpPr/>
-          <p:nvPr/>
-        </p:nvSpPr>
-        <p:spPr>
-          <a:xfrm>
-            <a:off x="6675120" y="3657600"/>
-            <a:ext cx="1645920" cy="365760"/>
-          </a:xfrm>
-          <a:prstGeom prst="rect">
-            <a:avLst/>
-          </a:prstGeom>
-          <a:noFill/>
-          <a:ln/>
-        </p:spPr>
-        <p:txBody>
-          <a:bodyPr wrap="square" rtlCol="0" anchor="ctr"/>
-          <a:lstStyle/>
-          <a:p>
-            <a:pPr algn="ctr" indent="0" marL="0">
-              <a:buNone/>
-            </a:pPr>
-            <a:r>
-              <a:rPr lang="en-US" sz="1300" dirty="0">
-                <a:solidFill>
-                  <a:srgbClr val="7D8590"/>
-                </a:solidFill>
-                <a:latin typeface="Calibri" pitchFamily="34" charset="0"/>
-                <a:ea typeface="Calibri" pitchFamily="34" charset="-122"/>
-                <a:cs typeface="Calibri" pitchFamily="34" charset="-120"/>
-              </a:rPr>
-              <a:t>IX Grade</a:t>
-            </a:r>
-            <a:endParaRPr lang="en-US" sz="1300" dirty="0"/>
-          </a:p>
-        </p:txBody>
-      </p:sp>
-      <p:sp>
-        <p:nvSpPr>
-          <p:cNvPr id="14" name="Text 12"/>
-          <p:cNvSpPr/>
-          <p:nvPr/>
-        </p:nvSpPr>
-        <p:spPr>
-          <a:xfrm>
-            <a:off x="457200" y="4572000"/>
-            <a:ext cx="8229600" cy="320040"/>
-          </a:xfrm>
-          <a:prstGeom prst="rect">
-            <a:avLst/>
-          </a:prstGeom>
-          <a:noFill/>
-          <a:ln/>
-        </p:spPr>
-        <p:txBody>
-          <a:bodyPr wrap="square" rtlCol="0" anchor="ctr"/>
-          <a:lstStyle/>
-          <a:p>
-            <a:pPr algn="ctr" indent="0" marL="0">
-              <a:buNone/>
-            </a:pPr>
-            <a:r>
-              <a:rPr lang="en-US" sz="1100" i="1" dirty="0">
-                <a:solidFill>
-                  <a:srgbClr val="7D8590"/>
-                </a:solidFill>
-              </a:rPr>
-              <a:t>Professional Gymnasium for Computer Programming &amp; Innovations — Burgas  |  2025/2026</a:t>
-            </a:r>
-            <a:endParaRPr lang="en-US" sz="1100" dirty="0"/>
-          </a:p>
-        </p:txBody>
-      </p:sp>
-      <p:sp>
-        <p:nvSpPr>
-          <p:cNvPr id="15" name="Shape 13"/>
-          <p:cNvSpPr/>
-          <p:nvPr/>
-        </p:nvSpPr>
-        <p:spPr>
-          <a:xfrm>
-            <a:off x="0" y="5106924"/>
-            <a:ext cx="9144000" cy="36576"/>
-          </a:xfrm>
-          <a:prstGeom prst="rect">
-            <a:avLst/>
-          </a:prstGeom>
-          <a:solidFill>
-            <a:srgbClr val="58A6FF"/>
-          </a:solidFill>
-          <a:ln w="12700">
-            <a:solidFill>
-              <a:srgbClr val="58A6FF"/>
-            </a:solidFill>
-            <a:prstDash val="solid"/>
-          </a:ln>
-        </p:spPr>
+        <p:txBody>
+          <a:bodyPr/>
+          <a:lstStyle/>
+          <a:p>
+            <a:endParaRPr lang="en-US"/>
+          </a:p>
+        </p:txBody>
       </p:sp>
     </p:spTree>
   </p:cSld>
@@ -11357,4 +12822,319 @@
     </a:ext>
   </a:extLst>
 </a:theme>
+</file>
+
+<file path=ppt/theme/theme2.xml><?xml version="1.0" encoding="utf-8"?>
+<a:theme xmlns:a="http://schemas.openxmlformats.org/drawingml/2006/main" name="Office Theme">
+  <a:themeElements>
+    <a:clrScheme name="Office">
+      <a:dk1>
+        <a:sysClr val="windowText" lastClr="000000"/>
+      </a:dk1>
+      <a:lt1>
+        <a:sysClr val="window" lastClr="FFFFFF"/>
+      </a:lt1>
+      <a:dk2>
+        <a:srgbClr val="0E2841"/>
+      </a:dk2>
+      <a:lt2>
+        <a:srgbClr val="E8E8E8"/>
+      </a:lt2>
+      <a:accent1>
+        <a:srgbClr val="156082"/>
+      </a:accent1>
+      <a:accent2>
+        <a:srgbClr val="E97132"/>
+      </a:accent2>
+      <a:accent3>
+        <a:srgbClr val="196B24"/>
+      </a:accent3>
+      <a:accent4>
+        <a:srgbClr val="0F9ED5"/>
+      </a:accent4>
+      <a:accent5>
+        <a:srgbClr val="A02B93"/>
+      </a:accent5>
+      <a:accent6>
+        <a:srgbClr val="4EA72E"/>
+      </a:accent6>
+      <a:hlink>
+        <a:srgbClr val="467886"/>
+      </a:hlink>
+      <a:folHlink>
+        <a:srgbClr val="96607D"/>
+      </a:folHlink>
+    </a:clrScheme>
+    <a:fontScheme name="Office">
+      <a:majorFont>
+        <a:latin typeface="Aptos Display" panose="02110004020202020204"/>
+        <a:ea typeface=""/>
+        <a:cs typeface=""/>
+        <a:font script="Jpan" typeface="游ゴシック Light"/>
+        <a:font script="Hang" typeface="맑은 고딕"/>
+        <a:font script="Hans" typeface="等线 Light"/>
+        <a:font script="Hant" typeface="新細明體"/>
+        <a:font script="Arab" typeface="Times New Roman"/>
+        <a:font script="Hebr" typeface="Times New Roman"/>
+        <a:font script="Thai" typeface="Angsana New"/>
+        <a:font script="Ethi" typeface="Nyala"/>
+        <a:font script="Beng" typeface="Vrinda"/>
+        <a:font script="Gujr" typeface="Shruti"/>
+        <a:font script="Khmr" typeface="MoolBoran"/>
+        <a:font script="Knda" typeface="Tunga"/>
+        <a:font script="Guru" typeface="Raavi"/>
+        <a:font script="Cans" typeface="Euphemia"/>
+        <a:font script="Cher" typeface="Plantagenet Cherokee"/>
+        <a:font script="Yiii" typeface="Microsoft Yi Baiti"/>
+        <a:font script="Tibt" typeface="Microsoft Himalaya"/>
+        <a:font script="Thaa" typeface="MV Boli"/>
+        <a:font script="Deva" typeface="Mangal"/>
+        <a:font script="Telu" typeface="Gautami"/>
+        <a:font script="Taml" typeface="Latha"/>
+        <a:font script="Syrc" typeface="Estrangelo Edessa"/>
+        <a:font script="Orya" typeface="Kalinga"/>
+        <a:font script="Mlym" typeface="Kartika"/>
+        <a:font script="Laoo" typeface="DokChampa"/>
+        <a:font script="Sinh" typeface="Iskoola Pota"/>
+        <a:font script="Mong" typeface="Mongolian Baiti"/>
+        <a:font script="Viet" typeface="Times New Roman"/>
+        <a:font script="Uigh" typeface="Microsoft Uighur"/>
+        <a:font script="Geor" typeface="Sylfaen"/>
+        <a:font script="Armn" typeface="Arial"/>
+        <a:font script="Bugi" typeface="Leelawadee UI"/>
+        <a:font script="Bopo" typeface="Microsoft JhengHei"/>
+        <a:font script="Java" typeface="Javanese Text"/>
+        <a:font script="Lisu" typeface="Segoe UI"/>
+        <a:font script="Mymr" typeface="Myanmar Text"/>
+        <a:font script="Nkoo" typeface="Ebrima"/>
+        <a:font script="Olck" typeface="Nirmala UI"/>
+        <a:font script="Osma" typeface="Ebrima"/>
+        <a:font script="Phag" typeface="Phagspa"/>
+        <a:font script="Syrn" typeface="Estrangelo Edessa"/>
+        <a:font script="Syrj" typeface="Estrangelo Edessa"/>
+        <a:font script="Syre" typeface="Estrangelo Edessa"/>
+        <a:font script="Sora" typeface="Nirmala UI"/>
+        <a:font script="Tale" typeface="Microsoft Tai Le"/>
+        <a:font script="Talu" typeface="Microsoft New Tai Lue"/>
+        <a:font script="Tfng" typeface="Ebrima"/>
+      </a:majorFont>
+      <a:minorFont>
+        <a:latin typeface="Aptos" panose="02110004020202020204"/>
+        <a:ea typeface=""/>
+        <a:cs typeface=""/>
+        <a:font script="Jpan" typeface="游ゴシック"/>
+        <a:font script="Hang" typeface="맑은 고딕"/>
+        <a:font script="Hans" typeface="等线"/>
+        <a:font script="Hant" typeface="新細明體"/>
+        <a:font script="Arab" typeface="Arial"/>
+        <a:font script="Hebr" typeface="Arial"/>
+        <a:font script="Thai" typeface="Cordia New"/>
+        <a:font script="Ethi" typeface="Nyala"/>
+        <a:font script="Beng" typeface="Vrinda"/>
+        <a:font script="Gujr" typeface="Shruti"/>
+        <a:font script="Khmr" typeface="DaunPenh"/>
+        <a:font script="Knda" typeface="Tunga"/>
+        <a:font script="Guru" typeface="Raavi"/>
+        <a:font script="Cans" typeface="Euphemia"/>
+        <a:font script="Cher" typeface="Plantagenet Cherokee"/>
+        <a:font script="Yiii" typeface="Microsoft Yi Baiti"/>
+        <a:font script="Tibt" typeface="Microsoft Himalaya"/>
+        <a:font script="Thaa" typeface="MV Boli"/>
+        <a:font script="Deva" typeface="Mangal"/>
+        <a:font script="Telu" typeface="Gautami"/>
+        <a:font script="Taml" typeface="Latha"/>
+        <a:font script="Syrc" typeface="Estrangelo Edessa"/>
+        <a:font script="Orya" typeface="Kalinga"/>
+        <a:font script="Mlym" typeface="Kartika"/>
+        <a:font script="Laoo" typeface="DokChampa"/>
+        <a:font script="Sinh" typeface="Iskoola Pota"/>
+        <a:font script="Mong" typeface="Mongolian Baiti"/>
+        <a:font script="Viet" typeface="Arial"/>
+        <a:font script="Uigh" typeface="Microsoft Uighur"/>
+        <a:font script="Geor" typeface="Sylfaen"/>
+        <a:font script="Armn" typeface="Arial"/>
+        <a:font script="Bugi" typeface="Leelawadee UI"/>
+        <a:font script="Bopo" typeface="Microsoft JhengHei"/>
+        <a:font script="Java" typeface="Javanese Text"/>
+        <a:font script="Lisu" typeface="Segoe UI"/>
+        <a:font script="Mymr" typeface="Myanmar Text"/>
+        <a:font script="Nkoo" typeface="Ebrima"/>
+        <a:font script="Olck" typeface="Nirmala UI"/>
+        <a:font script="Osma" typeface="Ebrima"/>
+        <a:font script="Phag" typeface="Phagspa"/>
+        <a:font script="Syrn" typeface="Estrangelo Edessa"/>
+        <a:font script="Syrj" typeface="Estrangelo Edessa"/>
+        <a:font script="Syre" typeface="Estrangelo Edessa"/>
+        <a:font script="Sora" typeface="Nirmala UI"/>
+        <a:font script="Tale" typeface="Microsoft Tai Le"/>
+        <a:font script="Talu" typeface="Microsoft New Tai Lue"/>
+        <a:font script="Tfng" typeface="Ebrima"/>
+      </a:minorFont>
+    </a:fontScheme>
+    <a:fmtScheme name="Office">
+      <a:fillStyleLst>
+        <a:solidFill>
+          <a:schemeClr val="phClr"/>
+        </a:solidFill>
+        <a:gradFill rotWithShape="1">
+          <a:gsLst>
+            <a:gs pos="0">
+              <a:schemeClr val="phClr">
+                <a:lumMod val="110000"/>
+                <a:satMod val="105000"/>
+                <a:tint val="67000"/>
+              </a:schemeClr>
+            </a:gs>
+            <a:gs pos="50000">
+              <a:schemeClr val="phClr">
+                <a:lumMod val="105000"/>
+                <a:satMod val="103000"/>
+                <a:tint val="73000"/>
+              </a:schemeClr>
+            </a:gs>
+            <a:gs pos="100000">
+              <a:schemeClr val="phClr">
+                <a:lumMod val="105000"/>
+                <a:satMod val="109000"/>
+                <a:tint val="81000"/>
+              </a:schemeClr>
+            </a:gs>
+          </a:gsLst>
+          <a:lin ang="5400000" scaled="0"/>
+        </a:gradFill>
+        <a:gradFill rotWithShape="1">
+          <a:gsLst>
+            <a:gs pos="0">
+              <a:schemeClr val="phClr">
+                <a:satMod val="103000"/>
+                <a:lumMod val="102000"/>
+                <a:tint val="94000"/>
+              </a:schemeClr>
+            </a:gs>
+            <a:gs pos="50000">
+              <a:schemeClr val="phClr">
+                <a:satMod val="110000"/>
+                <a:lumMod val="100000"/>
+                <a:shade val="100000"/>
+              </a:schemeClr>
+            </a:gs>
+            <a:gs pos="100000">
+              <a:schemeClr val="phClr">
+                <a:lumMod val="99000"/>
+                <a:satMod val="120000"/>
+                <a:shade val="78000"/>
+              </a:schemeClr>
+            </a:gs>
+          </a:gsLst>
+          <a:lin ang="5400000" scaled="0"/>
+        </a:gradFill>
+      </a:fillStyleLst>
+      <a:lnStyleLst>
+        <a:ln w="12700" cap="flat" cmpd="sng" algn="ctr">
+          <a:solidFill>
+            <a:schemeClr val="phClr"/>
+          </a:solidFill>
+          <a:prstDash val="solid"/>
+          <a:miter lim="800000"/>
+        </a:ln>
+        <a:ln w="19050" cap="flat" cmpd="sng" algn="ctr">
+          <a:solidFill>
+            <a:schemeClr val="phClr"/>
+          </a:solidFill>
+          <a:prstDash val="solid"/>
+          <a:miter lim="800000"/>
+        </a:ln>
+        <a:ln w="25400" cap="flat" cmpd="sng" algn="ctr">
+          <a:solidFill>
+            <a:schemeClr val="phClr"/>
+          </a:solidFill>
+          <a:prstDash val="solid"/>
+          <a:miter lim="800000"/>
+        </a:ln>
+      </a:lnStyleLst>
+      <a:effectStyleLst>
+        <a:effectStyle>
+          <a:effectLst/>
+        </a:effectStyle>
+        <a:effectStyle>
+          <a:effectLst/>
+        </a:effectStyle>
+        <a:effectStyle>
+          <a:effectLst>
+            <a:outerShdw blurRad="57150" dist="19050" dir="5400000" algn="ctr" rotWithShape="0">
+              <a:srgbClr val="000000">
+                <a:alpha val="63000"/>
+              </a:srgbClr>
+            </a:outerShdw>
+          </a:effectLst>
+        </a:effectStyle>
+      </a:effectStyleLst>
+      <a:bgFillStyleLst>
+        <a:solidFill>
+          <a:schemeClr val="phClr"/>
+        </a:solidFill>
+        <a:solidFill>
+          <a:schemeClr val="phClr">
+            <a:tint val="95000"/>
+            <a:satMod val="170000"/>
+          </a:schemeClr>
+        </a:solidFill>
+        <a:gradFill rotWithShape="1">
+          <a:gsLst>
+            <a:gs pos="0">
+              <a:schemeClr val="phClr">
+                <a:tint val="93000"/>
+                <a:satMod val="150000"/>
+                <a:shade val="98000"/>
+                <a:lumMod val="102000"/>
+              </a:schemeClr>
+            </a:gs>
+            <a:gs pos="50000">
+              <a:schemeClr val="phClr">
+                <a:tint val="98000"/>
+                <a:satMod val="130000"/>
+                <a:shade val="90000"/>
+                <a:lumMod val="103000"/>
+              </a:schemeClr>
+            </a:gs>
+            <a:gs pos="100000">
+              <a:schemeClr val="phClr">
+                <a:shade val="63000"/>
+                <a:satMod val="120000"/>
+              </a:schemeClr>
+            </a:gs>
+          </a:gsLst>
+          <a:lin ang="5400000" scaled="0"/>
+        </a:gradFill>
+      </a:bgFillStyleLst>
+    </a:fmtScheme>
+  </a:themeElements>
+  <a:objectDefaults>
+    <a:lnDef>
+      <a:spPr/>
+      <a:bodyPr/>
+      <a:lstStyle/>
+      <a:style>
+        <a:lnRef idx="2">
+          <a:schemeClr val="accent1"/>
+        </a:lnRef>
+        <a:fillRef idx="0">
+          <a:schemeClr val="accent1"/>
+        </a:fillRef>
+        <a:effectRef idx="1">
+          <a:schemeClr val="accent1"/>
+        </a:effectRef>
+        <a:fontRef idx="minor">
+          <a:schemeClr val="tx1"/>
+        </a:fontRef>
+      </a:style>
+    </a:lnDef>
+  </a:objectDefaults>
+  <a:extraClrSchemeLst/>
+  <a:extLst>
+    <a:ext uri="{05A4C25C-085E-4340-85A3-A5531E510DB2}">
+      <thm15:themeFamily xmlns:thm15="http://schemas.microsoft.com/office/thememl/2012/main" name="Office Theme" id="{2E142A2C-CD16-42D6-873A-C26D2A0506FA}" vid="{1BDDFF52-6CD6-40A5-AB3C-68EB2F1E4D0A}"/>
+    </a:ext>
+  </a:extLst>
+</a:theme>
 </file>